--- a/public/lessons/year-6-maths/autumn/week-8/explain-and-evaluate-multi-step-solutions/teaching-powerpoint-v1.pptx
+++ b/public/lessons/year-6-maths/autumn/week-8/explain-and-evaluate-multi-step-solutions/teaching-powerpoint-v1.pptx
@@ -2,24 +2,24 @@
 <file path=ppt/presentation.xml><?xml version="1.0" encoding="utf-8"?>
 <p:presentation xmlns:p="http://schemas.openxmlformats.org/presentationml/2006/main">
   <p:sldMasterIdLst>
-    <p:sldMasterId xmlns:r="http://schemas.openxmlformats.org/officeDocument/2006/relationships" id="2147483648" r:id="R45e7edb5264e457b"/>
+    <p:sldMasterId xmlns:r="http://schemas.openxmlformats.org/officeDocument/2006/relationships" id="2147483648" r:id="Rae94c7c6fbbd4a9f"/>
   </p:sldMasterIdLst>
   <p:notesMasterIdLst>
-    <p:notesMasterId xmlns:r="http://schemas.openxmlformats.org/officeDocument/2006/relationships" r:id="R4b206d8dabfe4b67"/>
+    <p:notesMasterId xmlns:r="http://schemas.openxmlformats.org/officeDocument/2006/relationships" r:id="R1c6fa4c91f234d9c"/>
   </p:notesMasterIdLst>
   <p:sldIdLst>
-    <p:sldId xmlns:r="http://schemas.openxmlformats.org/officeDocument/2006/relationships" id="256" r:id="R607c59a129c0494d"/>
-    <p:sldId xmlns:r="http://schemas.openxmlformats.org/officeDocument/2006/relationships" id="257" r:id="R6e2fae0566f8471d"/>
-    <p:sldId xmlns:r="http://schemas.openxmlformats.org/officeDocument/2006/relationships" id="258" r:id="R3cb5145f7200473e"/>
-    <p:sldId xmlns:r="http://schemas.openxmlformats.org/officeDocument/2006/relationships" id="259" r:id="Rf29bf7150ec74bb4"/>
-    <p:sldId xmlns:r="http://schemas.openxmlformats.org/officeDocument/2006/relationships" id="260" r:id="Ra479f770857d4895"/>
-    <p:sldId xmlns:r="http://schemas.openxmlformats.org/officeDocument/2006/relationships" id="261" r:id="Rd27bc9d638b24065"/>
-    <p:sldId xmlns:r="http://schemas.openxmlformats.org/officeDocument/2006/relationships" id="262" r:id="R4c8696516ff244c6"/>
-    <p:sldId xmlns:r="http://schemas.openxmlformats.org/officeDocument/2006/relationships" id="263" r:id="R2b46dfb5cf2c4878"/>
-    <p:sldId xmlns:r="http://schemas.openxmlformats.org/officeDocument/2006/relationships" id="264" r:id="R42a4f397b646432f"/>
-    <p:sldId xmlns:r="http://schemas.openxmlformats.org/officeDocument/2006/relationships" id="265" r:id="Rdbc345312dd14375"/>
-    <p:sldId xmlns:r="http://schemas.openxmlformats.org/officeDocument/2006/relationships" id="266" r:id="R1a29a6e890f8463e"/>
-    <p:sldId xmlns:r="http://schemas.openxmlformats.org/officeDocument/2006/relationships" id="267" r:id="R70ec317fca474557"/>
+    <p:sldId xmlns:r="http://schemas.openxmlformats.org/officeDocument/2006/relationships" id="256" r:id="R607b2d9d01d04b7d"/>
+    <p:sldId xmlns:r="http://schemas.openxmlformats.org/officeDocument/2006/relationships" id="257" r:id="Ra18e4a0c7acd44d2"/>
+    <p:sldId xmlns:r="http://schemas.openxmlformats.org/officeDocument/2006/relationships" id="258" r:id="Rda0ce8baf0ee470a"/>
+    <p:sldId xmlns:r="http://schemas.openxmlformats.org/officeDocument/2006/relationships" id="259" r:id="R4d517bb9854f4f3d"/>
+    <p:sldId xmlns:r="http://schemas.openxmlformats.org/officeDocument/2006/relationships" id="260" r:id="R0c5ece2a05c845c5"/>
+    <p:sldId xmlns:r="http://schemas.openxmlformats.org/officeDocument/2006/relationships" id="261" r:id="R23da05421d14492b"/>
+    <p:sldId xmlns:r="http://schemas.openxmlformats.org/officeDocument/2006/relationships" id="262" r:id="R4e35b9666f354b4e"/>
+    <p:sldId xmlns:r="http://schemas.openxmlformats.org/officeDocument/2006/relationships" id="263" r:id="R5171e5f3dbcd4c7b"/>
+    <p:sldId xmlns:r="http://schemas.openxmlformats.org/officeDocument/2006/relationships" id="264" r:id="R432452700a7c4fcd"/>
+    <p:sldId xmlns:r="http://schemas.openxmlformats.org/officeDocument/2006/relationships" id="265" r:id="Rd3914e717bff45a3"/>
+    <p:sldId xmlns:r="http://schemas.openxmlformats.org/officeDocument/2006/relationships" id="266" r:id="R25efd468f6124b6f"/>
+    <p:sldId xmlns:r="http://schemas.openxmlformats.org/officeDocument/2006/relationships" id="267" r:id="R3f925edb84264f0b"/>
   </p:sldIdLst>
   <p:sldSz cx="12192000" cy="6858000"/>
   <p:notesSz cx="6858000" cy="9144000"/>
@@ -873,7 +873,7 @@
           <a:lstStyle xmlns:a="http://schemas.openxmlformats.org/drawingml/2006/main"/>
           <a:p xmlns:a="http://schemas.openxmlformats.org/drawingml/2006/main">
             <a:r>
-              <a:t>I do. Reveal the question, setup and each calculation stage one click at a time. Pupils watch before copying. Model answer: Multiplication must represent the total books first, so multiply first. The answer is 2,240.</a:t>
+              <a:t>I do. Reveal the question, then reveal each mathematical change one click at a time. Point to the numbers and operation that changed before moving to the next line. Final answer: Multiplication must represent the total books first, so multiply first. The answer is 2,240.</a:t>
             </a:r>
           </a:p>
         </p:txBody>
@@ -1291,7 +1291,7 @@
   </p:cSld>
   <p:clrMap bg1="lt1" tx1="dk1" bg2="lt2" tx2="dk2" accent1="accent1" accent2="accent2" accent3="accent3" accent4="accent4" accent5="accent5" accent6="accent6" hlink="hlink" folHlink="folHlink"/>
   <p:sldLayoutIdLst>
-    <p:sldLayoutId xmlns:r="http://schemas.openxmlformats.org/officeDocument/2006/relationships" id="2147483649" r:id="R67da42cb186a48d3"/>
+    <p:sldLayoutId xmlns:r="http://schemas.openxmlformats.org/officeDocument/2006/relationships" id="2147483649" r:id="Rd6caa40242314eab"/>
   </p:sldLayoutIdLst>
   <p:txStyles>
     <p:titleStyle>
@@ -1842,7 +1842,7 @@
           <p:cNvPr id="12" name="">
             <a:extLst xmlns:a="http://schemas.openxmlformats.org/drawingml/2006/main">
               <a:ext uri="{FF2B5EF4-FFF2-40B4-BE49-F238E27FC236}">
-                <a16:creationId xmlns:a16="http://schemas.microsoft.com/office/drawing/2014/main" id="{5FEF1BD4-3AF7-42F1-833C-C718A72F4CAF}"/>
+                <a16:creationId xmlns:a16="http://schemas.microsoft.com/office/drawing/2014/main" id="{C0C88B6E-5526-4887-A495-C6CF3804EAE9}"/>
               </a:ext>
             </a:extLst>
           </p:cNvPr>
@@ -1874,7 +1874,7 @@
           <p:cNvPr id="2" name="">
             <a:extLst xmlns:a="http://schemas.openxmlformats.org/drawingml/2006/main">
               <a:ext uri="{FF2B5EF4-FFF2-40B4-BE49-F238E27FC236}">
-                <a16:creationId xmlns:a16="http://schemas.microsoft.com/office/drawing/2014/main" id="{0BEA2B3A-98F7-4FA1-98DD-A6076D260BDD}"/>
+                <a16:creationId xmlns:a16="http://schemas.microsoft.com/office/drawing/2014/main" id="{33E97C3B-CD9E-4A42-B75F-FA7552F0404C}"/>
               </a:ext>
             </a:extLst>
           </p:cNvPr>
@@ -1931,7 +1931,7 @@
           <p:cNvPr id="3" name="">
             <a:extLst xmlns:a="http://schemas.openxmlformats.org/drawingml/2006/main">
               <a:ext uri="{FF2B5EF4-FFF2-40B4-BE49-F238E27FC236}">
-                <a16:creationId xmlns:a16="http://schemas.microsoft.com/office/drawing/2014/main" id="{BF635651-0C15-4720-BCB4-2BD6C478E611}"/>
+                <a16:creationId xmlns:a16="http://schemas.microsoft.com/office/drawing/2014/main" id="{CBCE6256-9934-480F-8B9E-F8518CB1D1FC}"/>
               </a:ext>
             </a:extLst>
           </p:cNvPr>
@@ -1965,7 +1965,7 @@
           <p:cNvPr id="4" name="">
             <a:extLst xmlns:a="http://schemas.openxmlformats.org/drawingml/2006/main">
               <a:ext uri="{FF2B5EF4-FFF2-40B4-BE49-F238E27FC236}">
-                <a16:creationId xmlns:a16="http://schemas.microsoft.com/office/drawing/2014/main" id="{22F4BF6B-BF90-4CD9-972B-608ECE95078D}"/>
+                <a16:creationId xmlns:a16="http://schemas.microsoft.com/office/drawing/2014/main" id="{1527D814-7A13-4E98-9AD2-58580D274258}"/>
               </a:ext>
             </a:extLst>
           </p:cNvPr>
@@ -2022,7 +2022,7 @@
           <p:cNvPr id="5" name="">
             <a:extLst xmlns:a="http://schemas.openxmlformats.org/drawingml/2006/main">
               <a:ext uri="{FF2B5EF4-FFF2-40B4-BE49-F238E27FC236}">
-                <a16:creationId xmlns:a16="http://schemas.microsoft.com/office/drawing/2014/main" id="{44252E16-A5C9-42FF-91E7-4831C28415F8}"/>
+                <a16:creationId xmlns:a16="http://schemas.microsoft.com/office/drawing/2014/main" id="{02603280-24B2-4E00-A05B-F078D710569C}"/>
               </a:ext>
             </a:extLst>
           </p:cNvPr>
@@ -2079,7 +2079,7 @@
           <p:cNvPr id="6" name="">
             <a:extLst xmlns:a="http://schemas.openxmlformats.org/drawingml/2006/main">
               <a:ext uri="{FF2B5EF4-FFF2-40B4-BE49-F238E27FC236}">
-                <a16:creationId xmlns:a16="http://schemas.microsoft.com/office/drawing/2014/main" id="{4C4F7A7D-D11B-402F-95C6-E668917402DA}"/>
+                <a16:creationId xmlns:a16="http://schemas.microsoft.com/office/drawing/2014/main" id="{CEC6DB4A-8723-45B3-8431-82C356F46C80}"/>
               </a:ext>
             </a:extLst>
           </p:cNvPr>
@@ -2113,7 +2113,7 @@
           <p:cNvPr id="7" name="">
             <a:extLst xmlns:a="http://schemas.openxmlformats.org/drawingml/2006/main">
               <a:ext uri="{FF2B5EF4-FFF2-40B4-BE49-F238E27FC236}">
-                <a16:creationId xmlns:a16="http://schemas.microsoft.com/office/drawing/2014/main" id="{0DDE4EB0-92E4-4049-B68D-AA8D701AC54A}"/>
+                <a16:creationId xmlns:a16="http://schemas.microsoft.com/office/drawing/2014/main" id="{95D7DBDC-45EF-4B4B-985D-2E688A7DEE72}"/>
               </a:ext>
             </a:extLst>
           </p:cNvPr>
@@ -2170,7 +2170,7 @@
           <p:cNvPr id="8" name="">
             <a:extLst xmlns:a="http://schemas.openxmlformats.org/drawingml/2006/main">
               <a:ext uri="{FF2B5EF4-FFF2-40B4-BE49-F238E27FC236}">
-                <a16:creationId xmlns:a16="http://schemas.microsoft.com/office/drawing/2014/main" id="{3A434CB3-1D0E-4F4C-B06B-CE7F55579179}"/>
+                <a16:creationId xmlns:a16="http://schemas.microsoft.com/office/drawing/2014/main" id="{A7E247A9-19D4-4CA5-950F-8FCCE8EA6FB8}"/>
               </a:ext>
             </a:extLst>
           </p:cNvPr>
@@ -2227,7 +2227,7 @@
           <p:cNvPr id="9" name="">
             <a:extLst xmlns:a="http://schemas.openxmlformats.org/drawingml/2006/main">
               <a:ext uri="{FF2B5EF4-FFF2-40B4-BE49-F238E27FC236}">
-                <a16:creationId xmlns:a16="http://schemas.microsoft.com/office/drawing/2014/main" id="{319E8AEF-1B52-4B63-8AB4-355857AF5159}"/>
+                <a16:creationId xmlns:a16="http://schemas.microsoft.com/office/drawing/2014/main" id="{21EB243E-18FF-4C73-8333-9780A87028FE}"/>
               </a:ext>
             </a:extLst>
           </p:cNvPr>
@@ -2284,7 +2284,7 @@
           <p:cNvPr id="10" name="">
             <a:extLst xmlns:a="http://schemas.openxmlformats.org/drawingml/2006/main">
               <a:ext uri="{FF2B5EF4-FFF2-40B4-BE49-F238E27FC236}">
-                <a16:creationId xmlns:a16="http://schemas.microsoft.com/office/drawing/2014/main" id="{63CAF9C1-A2B9-4C1F-89DF-7EAA385BABAD}"/>
+                <a16:creationId xmlns:a16="http://schemas.microsoft.com/office/drawing/2014/main" id="{867C6B5C-22B3-477E-8737-AE3C102DE247}"/>
               </a:ext>
             </a:extLst>
           </p:cNvPr>
@@ -2341,7 +2341,7 @@
           <p:cNvPr id="11" name="">
             <a:extLst xmlns:a="http://schemas.openxmlformats.org/drawingml/2006/main">
               <a:ext uri="{FF2B5EF4-FFF2-40B4-BE49-F238E27FC236}">
-                <a16:creationId xmlns:a16="http://schemas.microsoft.com/office/drawing/2014/main" id="{0C6D528E-8A31-4BDC-A48A-082373FD2DEC}"/>
+                <a16:creationId xmlns:a16="http://schemas.microsoft.com/office/drawing/2014/main" id="{77753FD3-68C7-4694-9600-CD1185905E9E}"/>
               </a:ext>
             </a:extLst>
           </p:cNvPr>
@@ -2396,7 +2396,7 @@
     </p:spTree>
     <p:extLst>
       <p:ext uri="{BB962C8B-B14F-4D97-AF65-F5344CB8AC3E}">
-        <p14:creationId xmlns:p14="http://schemas.microsoft.com/office/powerpoint/2010/main" val="1778568015"/>
+        <p14:creationId xmlns:p14="http://schemas.microsoft.com/office/powerpoint/2010/main" val="920078223"/>
       </p:ext>
     </p:extLst>
   </p:cSld>
@@ -2427,7 +2427,7 @@
           <p:cNvPr id="14" name="">
             <a:extLst xmlns:a="http://schemas.openxmlformats.org/drawingml/2006/main">
               <a:ext uri="{FF2B5EF4-FFF2-40B4-BE49-F238E27FC236}">
-                <a16:creationId xmlns:a16="http://schemas.microsoft.com/office/drawing/2014/main" id="{B2D846D6-F532-4E05-907D-131B120BEFF4}"/>
+                <a16:creationId xmlns:a16="http://schemas.microsoft.com/office/drawing/2014/main" id="{F20C4759-8D92-43BA-8460-93E94D6B8A32}"/>
               </a:ext>
             </a:extLst>
           </p:cNvPr>
@@ -2459,7 +2459,7 @@
           <p:cNvPr id="2" name="">
             <a:extLst xmlns:a="http://schemas.openxmlformats.org/drawingml/2006/main">
               <a:ext uri="{FF2B5EF4-FFF2-40B4-BE49-F238E27FC236}">
-                <a16:creationId xmlns:a16="http://schemas.microsoft.com/office/drawing/2014/main" id="{775A9C76-0A76-4D0E-AF3A-8A84BB620154}"/>
+                <a16:creationId xmlns:a16="http://schemas.microsoft.com/office/drawing/2014/main" id="{53F4C589-69B7-41DB-9A0D-C8ECAC792BE8}"/>
               </a:ext>
             </a:extLst>
           </p:cNvPr>
@@ -2516,7 +2516,7 @@
           <p:cNvPr id="3" name="">
             <a:extLst xmlns:a="http://schemas.openxmlformats.org/drawingml/2006/main">
               <a:ext uri="{FF2B5EF4-FFF2-40B4-BE49-F238E27FC236}">
-                <a16:creationId xmlns:a16="http://schemas.microsoft.com/office/drawing/2014/main" id="{7BCB097B-BA09-4274-AD70-5F81D2A9EE86}"/>
+                <a16:creationId xmlns:a16="http://schemas.microsoft.com/office/drawing/2014/main" id="{C985E552-1767-4C3A-8FC8-7E692729113E}"/>
               </a:ext>
             </a:extLst>
           </p:cNvPr>
@@ -2548,7 +2548,7 @@
           <p:cNvPr id="4" name="">
             <a:extLst xmlns:a="http://schemas.openxmlformats.org/drawingml/2006/main">
               <a:ext uri="{FF2B5EF4-FFF2-40B4-BE49-F238E27FC236}">
-                <a16:creationId xmlns:a16="http://schemas.microsoft.com/office/drawing/2014/main" id="{E2D77445-70A1-4464-B46F-433A27177E1C}"/>
+                <a16:creationId xmlns:a16="http://schemas.microsoft.com/office/drawing/2014/main" id="{5622FD02-141D-4916-9906-2A75E287E5B6}"/>
               </a:ext>
             </a:extLst>
           </p:cNvPr>
@@ -2605,7 +2605,7 @@
           <p:cNvPr id="5" name="">
             <a:extLst xmlns:a="http://schemas.openxmlformats.org/drawingml/2006/main">
               <a:ext uri="{FF2B5EF4-FFF2-40B4-BE49-F238E27FC236}">
-                <a16:creationId xmlns:a16="http://schemas.microsoft.com/office/drawing/2014/main" id="{8D0CE717-E0A1-4BCB-9C52-607FA661454D}"/>
+                <a16:creationId xmlns:a16="http://schemas.microsoft.com/office/drawing/2014/main" id="{4025ABC0-BBF5-4B8E-A5C4-D1AD722689D8}"/>
               </a:ext>
             </a:extLst>
           </p:cNvPr>
@@ -2662,7 +2662,7 @@
           <p:cNvPr id="6" name="">
             <a:extLst xmlns:a="http://schemas.openxmlformats.org/drawingml/2006/main">
               <a:ext uri="{FF2B5EF4-FFF2-40B4-BE49-F238E27FC236}">
-                <a16:creationId xmlns:a16="http://schemas.microsoft.com/office/drawing/2014/main" id="{1309546E-B91B-4097-A365-6FF1835ECB26}"/>
+                <a16:creationId xmlns:a16="http://schemas.microsoft.com/office/drawing/2014/main" id="{6A962D56-196F-438E-9C49-395D4ABC5922}"/>
               </a:ext>
             </a:extLst>
           </p:cNvPr>
@@ -2719,7 +2719,7 @@
           <p:cNvPr id="7" name="">
             <a:extLst xmlns:a="http://schemas.openxmlformats.org/drawingml/2006/main">
               <a:ext uri="{FF2B5EF4-FFF2-40B4-BE49-F238E27FC236}">
-                <a16:creationId xmlns:a16="http://schemas.microsoft.com/office/drawing/2014/main" id="{768FC178-6BAA-4643-9ABC-6F03CE2BEA2D}"/>
+                <a16:creationId xmlns:a16="http://schemas.microsoft.com/office/drawing/2014/main" id="{65746196-3666-4558-857C-4740E402DEB2}"/>
               </a:ext>
             </a:extLst>
           </p:cNvPr>
@@ -2751,7 +2751,7 @@
           <p:cNvPr id="8" name="">
             <a:extLst xmlns:a="http://schemas.openxmlformats.org/drawingml/2006/main">
               <a:ext uri="{FF2B5EF4-FFF2-40B4-BE49-F238E27FC236}">
-                <a16:creationId xmlns:a16="http://schemas.microsoft.com/office/drawing/2014/main" id="{5903104B-D6F5-4349-9ED1-897CDA4A6F44}"/>
+                <a16:creationId xmlns:a16="http://schemas.microsoft.com/office/drawing/2014/main" id="{4439F3B5-E802-41E0-A94E-102555747433}"/>
               </a:ext>
             </a:extLst>
           </p:cNvPr>
@@ -2808,7 +2808,7 @@
           <p:cNvPr id="9" name="">
             <a:extLst xmlns:a="http://schemas.openxmlformats.org/drawingml/2006/main">
               <a:ext uri="{FF2B5EF4-FFF2-40B4-BE49-F238E27FC236}">
-                <a16:creationId xmlns:a16="http://schemas.microsoft.com/office/drawing/2014/main" id="{BB4A11E9-673D-4113-B963-129EBF7AF985}"/>
+                <a16:creationId xmlns:a16="http://schemas.microsoft.com/office/drawing/2014/main" id="{E5C42D08-0BA4-4FA6-BCCA-2BB0D5322E1A}"/>
               </a:ext>
             </a:extLst>
           </p:cNvPr>
@@ -2865,7 +2865,7 @@
           <p:cNvPr id="10" name="">
             <a:extLst xmlns:a="http://schemas.openxmlformats.org/drawingml/2006/main">
               <a:ext uri="{FF2B5EF4-FFF2-40B4-BE49-F238E27FC236}">
-                <a16:creationId xmlns:a16="http://schemas.microsoft.com/office/drawing/2014/main" id="{332E1EE8-BB89-412B-BE57-C0C410E3DABE}"/>
+                <a16:creationId xmlns:a16="http://schemas.microsoft.com/office/drawing/2014/main" id="{4C5A5951-D5EA-42B8-98CD-E5DBA7EAFE0D}"/>
               </a:ext>
             </a:extLst>
           </p:cNvPr>
@@ -2922,7 +2922,7 @@
           <p:cNvPr id="11" name="">
             <a:extLst xmlns:a="http://schemas.openxmlformats.org/drawingml/2006/main">
               <a:ext uri="{FF2B5EF4-FFF2-40B4-BE49-F238E27FC236}">
-                <a16:creationId xmlns:a16="http://schemas.microsoft.com/office/drawing/2014/main" id="{10CB5EFC-8A32-48BC-9E19-C493AA71B6BC}"/>
+                <a16:creationId xmlns:a16="http://schemas.microsoft.com/office/drawing/2014/main" id="{5185F745-6761-44A3-8F8F-5139C20280EB}"/>
               </a:ext>
             </a:extLst>
           </p:cNvPr>
@@ -2979,7 +2979,7 @@
           <p:cNvPr id="12" name="">
             <a:extLst xmlns:a="http://schemas.openxmlformats.org/drawingml/2006/main">
               <a:ext uri="{FF2B5EF4-FFF2-40B4-BE49-F238E27FC236}">
-                <a16:creationId xmlns:a16="http://schemas.microsoft.com/office/drawing/2014/main" id="{F7EBBCC7-3795-43B8-94B6-C5C63AE52F1F}"/>
+                <a16:creationId xmlns:a16="http://schemas.microsoft.com/office/drawing/2014/main" id="{1C3D5E68-173D-4248-A6DD-FF7F18185680}"/>
               </a:ext>
             </a:extLst>
           </p:cNvPr>
@@ -3036,7 +3036,7 @@
           <p:cNvPr id="13" name="">
             <a:extLst xmlns:a="http://schemas.openxmlformats.org/drawingml/2006/main">
               <a:ext uri="{FF2B5EF4-FFF2-40B4-BE49-F238E27FC236}">
-                <a16:creationId xmlns:a16="http://schemas.microsoft.com/office/drawing/2014/main" id="{1C19A04C-B258-4E9E-A835-515C8CAF4074}"/>
+                <a16:creationId xmlns:a16="http://schemas.microsoft.com/office/drawing/2014/main" id="{38B283B7-0A55-4AC5-93E7-B029280B1D77}"/>
               </a:ext>
             </a:extLst>
           </p:cNvPr>
@@ -3091,7 +3091,7 @@
     </p:spTree>
     <p:extLst>
       <p:ext uri="{BB962C8B-B14F-4D97-AF65-F5344CB8AC3E}">
-        <p14:creationId xmlns:p14="http://schemas.microsoft.com/office/powerpoint/2010/main" val="1310484930"/>
+        <p14:creationId xmlns:p14="http://schemas.microsoft.com/office/powerpoint/2010/main" val="955466012"/>
       </p:ext>
     </p:extLst>
   </p:cSld>
@@ -3292,7 +3292,7 @@
           <p:cNvPr id="19" name="">
             <a:extLst xmlns:a="http://schemas.openxmlformats.org/drawingml/2006/main">
               <a:ext uri="{FF2B5EF4-FFF2-40B4-BE49-F238E27FC236}">
-                <a16:creationId xmlns:a16="http://schemas.microsoft.com/office/drawing/2014/main" id="{ED75EA3D-5093-4109-8F2D-95BB15396934}"/>
+                <a16:creationId xmlns:a16="http://schemas.microsoft.com/office/drawing/2014/main" id="{D4D23146-22DC-4159-9F9F-DE0C690F16B2}"/>
               </a:ext>
             </a:extLst>
           </p:cNvPr>
@@ -3324,7 +3324,7 @@
           <p:cNvPr id="2" name="">
             <a:extLst xmlns:a="http://schemas.openxmlformats.org/drawingml/2006/main">
               <a:ext uri="{FF2B5EF4-FFF2-40B4-BE49-F238E27FC236}">
-                <a16:creationId xmlns:a16="http://schemas.microsoft.com/office/drawing/2014/main" id="{C9938D50-9099-4195-853A-60B0E048963A}"/>
+                <a16:creationId xmlns:a16="http://schemas.microsoft.com/office/drawing/2014/main" id="{A4D061FE-C766-4410-AE19-4DC64841405E}"/>
               </a:ext>
             </a:extLst>
           </p:cNvPr>
@@ -3381,7 +3381,7 @@
           <p:cNvPr id="3" name="">
             <a:extLst xmlns:a="http://schemas.openxmlformats.org/drawingml/2006/main">
               <a:ext uri="{FF2B5EF4-FFF2-40B4-BE49-F238E27FC236}">
-                <a16:creationId xmlns:a16="http://schemas.microsoft.com/office/drawing/2014/main" id="{58A20652-B508-4049-83AF-9462C83D90D3}"/>
+                <a16:creationId xmlns:a16="http://schemas.microsoft.com/office/drawing/2014/main" id="{D9AE972E-DD8D-4B85-B2D8-14C07EB00E4E}"/>
               </a:ext>
             </a:extLst>
           </p:cNvPr>
@@ -3413,7 +3413,7 @@
           <p:cNvPr id="4" name="">
             <a:extLst xmlns:a="http://schemas.openxmlformats.org/drawingml/2006/main">
               <a:ext uri="{FF2B5EF4-FFF2-40B4-BE49-F238E27FC236}">
-                <a16:creationId xmlns:a16="http://schemas.microsoft.com/office/drawing/2014/main" id="{F28F31CB-12B5-4F38-9FDA-1EC165ED9EAB}"/>
+                <a16:creationId xmlns:a16="http://schemas.microsoft.com/office/drawing/2014/main" id="{0958341D-EBF2-424C-B5AB-7D369D59CDC7}"/>
               </a:ext>
             </a:extLst>
           </p:cNvPr>
@@ -3470,7 +3470,7 @@
           <p:cNvPr id="5" name="">
             <a:extLst xmlns:a="http://schemas.openxmlformats.org/drawingml/2006/main">
               <a:ext uri="{FF2B5EF4-FFF2-40B4-BE49-F238E27FC236}">
-                <a16:creationId xmlns:a16="http://schemas.microsoft.com/office/drawing/2014/main" id="{793F988B-9336-4852-8ACE-7DECE7754FD1}"/>
+                <a16:creationId xmlns:a16="http://schemas.microsoft.com/office/drawing/2014/main" id="{375A0C37-E939-4972-A9B1-2B9BC60BE7C1}"/>
               </a:ext>
             </a:extLst>
           </p:cNvPr>
@@ -3527,7 +3527,7 @@
           <p:cNvPr id="6" name="">
             <a:extLst xmlns:a="http://schemas.openxmlformats.org/drawingml/2006/main">
               <a:ext uri="{FF2B5EF4-FFF2-40B4-BE49-F238E27FC236}">
-                <a16:creationId xmlns:a16="http://schemas.microsoft.com/office/drawing/2014/main" id="{3A59EF7D-3FB2-49F5-B03E-6880FF2953FF}"/>
+                <a16:creationId xmlns:a16="http://schemas.microsoft.com/office/drawing/2014/main" id="{04689DC7-A937-472F-BEC8-8C8E63E8DD49}"/>
               </a:ext>
             </a:extLst>
           </p:cNvPr>
@@ -3584,7 +3584,7 @@
           <p:cNvPr id="7" name="">
             <a:extLst xmlns:a="http://schemas.openxmlformats.org/drawingml/2006/main">
               <a:ext uri="{FF2B5EF4-FFF2-40B4-BE49-F238E27FC236}">
-                <a16:creationId xmlns:a16="http://schemas.microsoft.com/office/drawing/2014/main" id="{6A814317-75FE-44C5-89F5-844DD62CD98A}"/>
+                <a16:creationId xmlns:a16="http://schemas.microsoft.com/office/drawing/2014/main" id="{73AAB47E-E24F-4508-A993-7E5C281DB235}"/>
               </a:ext>
             </a:extLst>
           </p:cNvPr>
@@ -3616,7 +3616,7 @@
           <p:cNvPr id="8" name="">
             <a:extLst xmlns:a="http://schemas.openxmlformats.org/drawingml/2006/main">
               <a:ext uri="{FF2B5EF4-FFF2-40B4-BE49-F238E27FC236}">
-                <a16:creationId xmlns:a16="http://schemas.microsoft.com/office/drawing/2014/main" id="{04DEBCFD-1BBD-480C-A34E-2860915F1DF6}"/>
+                <a16:creationId xmlns:a16="http://schemas.microsoft.com/office/drawing/2014/main" id="{7205C2FF-F255-43A1-9BA4-2A445E8F7136}"/>
               </a:ext>
             </a:extLst>
           </p:cNvPr>
@@ -3673,7 +3673,7 @@
           <p:cNvPr id="9" name="">
             <a:extLst xmlns:a="http://schemas.openxmlformats.org/drawingml/2006/main">
               <a:ext uri="{FF2B5EF4-FFF2-40B4-BE49-F238E27FC236}">
-                <a16:creationId xmlns:a16="http://schemas.microsoft.com/office/drawing/2014/main" id="{3113DE25-B274-448E-A3E1-5FCB49B610A3}"/>
+                <a16:creationId xmlns:a16="http://schemas.microsoft.com/office/drawing/2014/main" id="{4EF7638D-618E-4FB2-AA44-A22185B624C8}"/>
               </a:ext>
             </a:extLst>
           </p:cNvPr>
@@ -3730,7 +3730,7 @@
           <p:cNvPr id="10" name="">
             <a:extLst xmlns:a="http://schemas.openxmlformats.org/drawingml/2006/main">
               <a:ext uri="{FF2B5EF4-FFF2-40B4-BE49-F238E27FC236}">
-                <a16:creationId xmlns:a16="http://schemas.microsoft.com/office/drawing/2014/main" id="{045117D4-7297-4DBE-9A9B-5E0678785870}"/>
+                <a16:creationId xmlns:a16="http://schemas.microsoft.com/office/drawing/2014/main" id="{F7A2126E-0BB0-47A0-BB66-4171F5D79FA5}"/>
               </a:ext>
             </a:extLst>
           </p:cNvPr>
@@ -3787,7 +3787,7 @@
           <p:cNvPr id="11" name="">
             <a:extLst xmlns:a="http://schemas.openxmlformats.org/drawingml/2006/main">
               <a:ext uri="{FF2B5EF4-FFF2-40B4-BE49-F238E27FC236}">
-                <a16:creationId xmlns:a16="http://schemas.microsoft.com/office/drawing/2014/main" id="{794F159F-3A92-409A-8A85-26A5153AAF72}"/>
+                <a16:creationId xmlns:a16="http://schemas.microsoft.com/office/drawing/2014/main" id="{F5C6C599-7E3A-473E-BC51-4B3A403815B4}"/>
               </a:ext>
             </a:extLst>
           </p:cNvPr>
@@ -3821,7 +3821,7 @@
           <p:cNvPr id="12" name="">
             <a:extLst xmlns:a="http://schemas.openxmlformats.org/drawingml/2006/main">
               <a:ext uri="{FF2B5EF4-FFF2-40B4-BE49-F238E27FC236}">
-                <a16:creationId xmlns:a16="http://schemas.microsoft.com/office/drawing/2014/main" id="{97AC6B41-7696-4110-8021-6761E24D60CB}"/>
+                <a16:creationId xmlns:a16="http://schemas.microsoft.com/office/drawing/2014/main" id="{C7C054A9-1266-4D0B-A0E4-202E31E936D9}"/>
               </a:ext>
             </a:extLst>
           </p:cNvPr>
@@ -3878,7 +3878,7 @@
           <p:cNvPr id="13" name="">
             <a:extLst xmlns:a="http://schemas.openxmlformats.org/drawingml/2006/main">
               <a:ext uri="{FF2B5EF4-FFF2-40B4-BE49-F238E27FC236}">
-                <a16:creationId xmlns:a16="http://schemas.microsoft.com/office/drawing/2014/main" id="{3115316E-BA8B-406F-B7A9-50FBB6452828}"/>
+                <a16:creationId xmlns:a16="http://schemas.microsoft.com/office/drawing/2014/main" id="{F87AFB25-20F5-4AD7-B8DC-8E7F21BCDB7F}"/>
               </a:ext>
             </a:extLst>
           </p:cNvPr>
@@ -3935,7 +3935,7 @@
           <p:cNvPr id="14" name="">
             <a:extLst xmlns:a="http://schemas.openxmlformats.org/drawingml/2006/main">
               <a:ext uri="{FF2B5EF4-FFF2-40B4-BE49-F238E27FC236}">
-                <a16:creationId xmlns:a16="http://schemas.microsoft.com/office/drawing/2014/main" id="{8873903A-B080-4027-B1FF-5902A8F5CC5A}"/>
+                <a16:creationId xmlns:a16="http://schemas.microsoft.com/office/drawing/2014/main" id="{F3C32111-F757-487D-909A-F21B6E12386E}"/>
               </a:ext>
             </a:extLst>
           </p:cNvPr>
@@ -3992,7 +3992,7 @@
           <p:cNvPr id="15" name="">
             <a:extLst xmlns:a="http://schemas.openxmlformats.org/drawingml/2006/main">
               <a:ext uri="{FF2B5EF4-FFF2-40B4-BE49-F238E27FC236}">
-                <a16:creationId xmlns:a16="http://schemas.microsoft.com/office/drawing/2014/main" id="{04203255-F64F-4C69-B9B0-21DB07C89B04}"/>
+                <a16:creationId xmlns:a16="http://schemas.microsoft.com/office/drawing/2014/main" id="{E78AA16E-D1A4-4891-BF76-A7604BB35C08}"/>
               </a:ext>
             </a:extLst>
           </p:cNvPr>
@@ -4026,7 +4026,7 @@
           <p:cNvPr id="16" name="">
             <a:extLst xmlns:a="http://schemas.openxmlformats.org/drawingml/2006/main">
               <a:ext uri="{FF2B5EF4-FFF2-40B4-BE49-F238E27FC236}">
-                <a16:creationId xmlns:a16="http://schemas.microsoft.com/office/drawing/2014/main" id="{4D34B75F-B085-42CA-A33A-04D369B02A0C}"/>
+                <a16:creationId xmlns:a16="http://schemas.microsoft.com/office/drawing/2014/main" id="{FA3E7C70-623C-4FD1-977F-DDC69F029456}"/>
               </a:ext>
             </a:extLst>
           </p:cNvPr>
@@ -4083,7 +4083,7 @@
           <p:cNvPr id="17" name="">
             <a:extLst xmlns:a="http://schemas.openxmlformats.org/drawingml/2006/main">
               <a:ext uri="{FF2B5EF4-FFF2-40B4-BE49-F238E27FC236}">
-                <a16:creationId xmlns:a16="http://schemas.microsoft.com/office/drawing/2014/main" id="{7B8A4EF4-00A4-4A78-99EA-727BC3B2DEFB}"/>
+                <a16:creationId xmlns:a16="http://schemas.microsoft.com/office/drawing/2014/main" id="{D88C7FE4-DB99-4444-B1B1-A13420A1852C}"/>
               </a:ext>
             </a:extLst>
           </p:cNvPr>
@@ -4140,7 +4140,7 @@
           <p:cNvPr id="18" name="">
             <a:extLst xmlns:a="http://schemas.openxmlformats.org/drawingml/2006/main">
               <a:ext uri="{FF2B5EF4-FFF2-40B4-BE49-F238E27FC236}">
-                <a16:creationId xmlns:a16="http://schemas.microsoft.com/office/drawing/2014/main" id="{8F2C1BC7-837D-4140-9ACB-EE8A5066B325}"/>
+                <a16:creationId xmlns:a16="http://schemas.microsoft.com/office/drawing/2014/main" id="{DD891206-3D01-4FD5-A590-22CF939399E7}"/>
               </a:ext>
             </a:extLst>
           </p:cNvPr>
@@ -4195,7 +4195,7 @@
     </p:spTree>
     <p:extLst>
       <p:ext uri="{BB962C8B-B14F-4D97-AF65-F5344CB8AC3E}">
-        <p14:creationId xmlns:p14="http://schemas.microsoft.com/office/powerpoint/2010/main" val="220084273"/>
+        <p14:creationId xmlns:p14="http://schemas.microsoft.com/office/powerpoint/2010/main" val="1952033909"/>
       </p:ext>
     </p:extLst>
   </p:cSld>
@@ -4350,7 +4350,7 @@
           <p:cNvPr id="23" name="">
             <a:extLst xmlns:a="http://schemas.openxmlformats.org/drawingml/2006/main">
               <a:ext uri="{FF2B5EF4-FFF2-40B4-BE49-F238E27FC236}">
-                <a16:creationId xmlns:a16="http://schemas.microsoft.com/office/drawing/2014/main" id="{A3578486-B80F-4592-845B-CCF9B4C43149}"/>
+                <a16:creationId xmlns:a16="http://schemas.microsoft.com/office/drawing/2014/main" id="{27F796EE-1D4E-443D-9405-902B8B90C3C2}"/>
               </a:ext>
             </a:extLst>
           </p:cNvPr>
@@ -4382,7 +4382,7 @@
           <p:cNvPr id="2" name="">
             <a:extLst xmlns:a="http://schemas.openxmlformats.org/drawingml/2006/main">
               <a:ext uri="{FF2B5EF4-FFF2-40B4-BE49-F238E27FC236}">
-                <a16:creationId xmlns:a16="http://schemas.microsoft.com/office/drawing/2014/main" id="{4A22B773-162C-4074-8FB2-267C95273D11}"/>
+                <a16:creationId xmlns:a16="http://schemas.microsoft.com/office/drawing/2014/main" id="{43E66E7A-0588-4629-93DF-3627979C2E9D}"/>
               </a:ext>
             </a:extLst>
           </p:cNvPr>
@@ -4439,7 +4439,7 @@
           <p:cNvPr id="3" name="">
             <a:extLst xmlns:a="http://schemas.openxmlformats.org/drawingml/2006/main">
               <a:ext uri="{FF2B5EF4-FFF2-40B4-BE49-F238E27FC236}">
-                <a16:creationId xmlns:a16="http://schemas.microsoft.com/office/drawing/2014/main" id="{C3AB764E-6F4D-4E79-97F8-2931EA57F75B}"/>
+                <a16:creationId xmlns:a16="http://schemas.microsoft.com/office/drawing/2014/main" id="{C3BB9A82-93A9-45A2-BD94-6C26FF1F7FAD}"/>
               </a:ext>
             </a:extLst>
           </p:cNvPr>
@@ -4471,7 +4471,7 @@
           <p:cNvPr id="4" name="">
             <a:extLst xmlns:a="http://schemas.openxmlformats.org/drawingml/2006/main">
               <a:ext uri="{FF2B5EF4-FFF2-40B4-BE49-F238E27FC236}">
-                <a16:creationId xmlns:a16="http://schemas.microsoft.com/office/drawing/2014/main" id="{57CCC5BA-F5EA-400E-B082-CCE293C24B8F}"/>
+                <a16:creationId xmlns:a16="http://schemas.microsoft.com/office/drawing/2014/main" id="{9CCD4283-5782-4766-BE58-09E104782CEC}"/>
               </a:ext>
             </a:extLst>
           </p:cNvPr>
@@ -4528,7 +4528,7 @@
           <p:cNvPr id="5" name="">
             <a:extLst xmlns:a="http://schemas.openxmlformats.org/drawingml/2006/main">
               <a:ext uri="{FF2B5EF4-FFF2-40B4-BE49-F238E27FC236}">
-                <a16:creationId xmlns:a16="http://schemas.microsoft.com/office/drawing/2014/main" id="{B5C79207-4C1F-48B7-9BC3-9CA9E7E691CC}"/>
+                <a16:creationId xmlns:a16="http://schemas.microsoft.com/office/drawing/2014/main" id="{145F58D8-BB67-4E8B-A8C8-DF2F17E0FA71}"/>
               </a:ext>
             </a:extLst>
           </p:cNvPr>
@@ -4585,7 +4585,7 @@
           <p:cNvPr id="6" name="">
             <a:extLst xmlns:a="http://schemas.openxmlformats.org/drawingml/2006/main">
               <a:ext uri="{FF2B5EF4-FFF2-40B4-BE49-F238E27FC236}">
-                <a16:creationId xmlns:a16="http://schemas.microsoft.com/office/drawing/2014/main" id="{3E04B3C2-0C19-4A79-A83C-0660F758E5FF}"/>
+                <a16:creationId xmlns:a16="http://schemas.microsoft.com/office/drawing/2014/main" id="{FE32067C-F45D-4A41-92A7-37CA5E13B241}"/>
               </a:ext>
             </a:extLst>
           </p:cNvPr>
@@ -4642,7 +4642,7 @@
           <p:cNvPr id="7" name="">
             <a:extLst xmlns:a="http://schemas.openxmlformats.org/drawingml/2006/main">
               <a:ext uri="{FF2B5EF4-FFF2-40B4-BE49-F238E27FC236}">
-                <a16:creationId xmlns:a16="http://schemas.microsoft.com/office/drawing/2014/main" id="{799B4059-CA37-4FEB-8486-A3DF0EE2D0D2}"/>
+                <a16:creationId xmlns:a16="http://schemas.microsoft.com/office/drawing/2014/main" id="{831EC830-4B06-46DF-AAD0-5054F7A3C02F}"/>
               </a:ext>
             </a:extLst>
           </p:cNvPr>
@@ -4674,7 +4674,7 @@
           <p:cNvPr id="8" name="">
             <a:extLst xmlns:a="http://schemas.openxmlformats.org/drawingml/2006/main">
               <a:ext uri="{FF2B5EF4-FFF2-40B4-BE49-F238E27FC236}">
-                <a16:creationId xmlns:a16="http://schemas.microsoft.com/office/drawing/2014/main" id="{8C344604-5B56-4BF7-8199-DDEC8EA048E5}"/>
+                <a16:creationId xmlns:a16="http://schemas.microsoft.com/office/drawing/2014/main" id="{6ED6A1EE-5AB2-4C85-8E30-3B11F5F27CCF}"/>
               </a:ext>
             </a:extLst>
           </p:cNvPr>
@@ -4731,7 +4731,7 @@
           <p:cNvPr id="9" name="">
             <a:extLst xmlns:a="http://schemas.openxmlformats.org/drawingml/2006/main">
               <a:ext uri="{FF2B5EF4-FFF2-40B4-BE49-F238E27FC236}">
-                <a16:creationId xmlns:a16="http://schemas.microsoft.com/office/drawing/2014/main" id="{CD4F5539-F355-4CDB-A7CD-8DF333775538}"/>
+                <a16:creationId xmlns:a16="http://schemas.microsoft.com/office/drawing/2014/main" id="{CACA9AFD-5754-436B-B67A-000B638A3966}"/>
               </a:ext>
             </a:extLst>
           </p:cNvPr>
@@ -4788,7 +4788,7 @@
           <p:cNvPr id="10" name="">
             <a:extLst xmlns:a="http://schemas.openxmlformats.org/drawingml/2006/main">
               <a:ext uri="{FF2B5EF4-FFF2-40B4-BE49-F238E27FC236}">
-                <a16:creationId xmlns:a16="http://schemas.microsoft.com/office/drawing/2014/main" id="{B63ADD20-FBAA-4F51-A78E-C914B5C3BDD5}"/>
+                <a16:creationId xmlns:a16="http://schemas.microsoft.com/office/drawing/2014/main" id="{DAF2648F-83CE-4FE7-9796-F2EDD042D319}"/>
               </a:ext>
             </a:extLst>
           </p:cNvPr>
@@ -4822,7 +4822,7 @@
           <p:cNvPr id="11" name="">
             <a:extLst xmlns:a="http://schemas.openxmlformats.org/drawingml/2006/main">
               <a:ext uri="{FF2B5EF4-FFF2-40B4-BE49-F238E27FC236}">
-                <a16:creationId xmlns:a16="http://schemas.microsoft.com/office/drawing/2014/main" id="{71476031-4DDB-416B-9F47-572B9041661F}"/>
+                <a16:creationId xmlns:a16="http://schemas.microsoft.com/office/drawing/2014/main" id="{F8C5A2C2-50DD-4179-A35A-5B8CC0365B54}"/>
               </a:ext>
             </a:extLst>
           </p:cNvPr>
@@ -4854,7 +4854,7 @@
           <p:cNvPr id="12" name="">
             <a:extLst xmlns:a="http://schemas.openxmlformats.org/drawingml/2006/main">
               <a:ext uri="{FF2B5EF4-FFF2-40B4-BE49-F238E27FC236}">
-                <a16:creationId xmlns:a16="http://schemas.microsoft.com/office/drawing/2014/main" id="{BC83F4F0-7247-4670-8052-0FAE6B4D72B4}"/>
+                <a16:creationId xmlns:a16="http://schemas.microsoft.com/office/drawing/2014/main" id="{A86AE153-41D1-4494-9795-61AC6BBC9B67}"/>
               </a:ext>
             </a:extLst>
           </p:cNvPr>
@@ -4911,7 +4911,7 @@
           <p:cNvPr id="13" name="">
             <a:extLst xmlns:a="http://schemas.openxmlformats.org/drawingml/2006/main">
               <a:ext uri="{FF2B5EF4-FFF2-40B4-BE49-F238E27FC236}">
-                <a16:creationId xmlns:a16="http://schemas.microsoft.com/office/drawing/2014/main" id="{C5B61FDF-C218-4172-B8FB-85A55DB85C50}"/>
+                <a16:creationId xmlns:a16="http://schemas.microsoft.com/office/drawing/2014/main" id="{1E19AB1D-068A-4649-B4B7-D8806FD9338D}"/>
               </a:ext>
             </a:extLst>
           </p:cNvPr>
@@ -4968,7 +4968,7 @@
           <p:cNvPr id="14" name="">
             <a:extLst xmlns:a="http://schemas.openxmlformats.org/drawingml/2006/main">
               <a:ext uri="{FF2B5EF4-FFF2-40B4-BE49-F238E27FC236}">
-                <a16:creationId xmlns:a16="http://schemas.microsoft.com/office/drawing/2014/main" id="{55766DAE-F6BE-4A1A-A437-503E40F100E9}"/>
+                <a16:creationId xmlns:a16="http://schemas.microsoft.com/office/drawing/2014/main" id="{F6B64D3A-53B2-49A9-AEAD-428125070106}"/>
               </a:ext>
             </a:extLst>
           </p:cNvPr>
@@ -5002,7 +5002,7 @@
           <p:cNvPr id="15" name="">
             <a:extLst xmlns:a="http://schemas.openxmlformats.org/drawingml/2006/main">
               <a:ext uri="{FF2B5EF4-FFF2-40B4-BE49-F238E27FC236}">
-                <a16:creationId xmlns:a16="http://schemas.microsoft.com/office/drawing/2014/main" id="{C63E9359-C092-4EA2-985C-86A08E27C2ED}"/>
+                <a16:creationId xmlns:a16="http://schemas.microsoft.com/office/drawing/2014/main" id="{B557F2FC-13A2-4768-872F-884B23217032}"/>
               </a:ext>
             </a:extLst>
           </p:cNvPr>
@@ -5034,7 +5034,7 @@
           <p:cNvPr id="16" name="">
             <a:extLst xmlns:a="http://schemas.openxmlformats.org/drawingml/2006/main">
               <a:ext uri="{FF2B5EF4-FFF2-40B4-BE49-F238E27FC236}">
-                <a16:creationId xmlns:a16="http://schemas.microsoft.com/office/drawing/2014/main" id="{3AC368FE-0266-4DE2-8B44-D02EC8C4E054}"/>
+                <a16:creationId xmlns:a16="http://schemas.microsoft.com/office/drawing/2014/main" id="{94F5B5F4-632D-4647-91ED-0CC6733FA07D}"/>
               </a:ext>
             </a:extLst>
           </p:cNvPr>
@@ -5091,7 +5091,7 @@
           <p:cNvPr id="17" name="">
             <a:extLst xmlns:a="http://schemas.openxmlformats.org/drawingml/2006/main">
               <a:ext uri="{FF2B5EF4-FFF2-40B4-BE49-F238E27FC236}">
-                <a16:creationId xmlns:a16="http://schemas.microsoft.com/office/drawing/2014/main" id="{637925E7-EFA9-4F01-8713-EE9EF556C702}"/>
+                <a16:creationId xmlns:a16="http://schemas.microsoft.com/office/drawing/2014/main" id="{09DD11E5-4D1E-400B-97AB-371A4BCB4C40}"/>
               </a:ext>
             </a:extLst>
           </p:cNvPr>
@@ -5148,7 +5148,7 @@
           <p:cNvPr id="18" name="">
             <a:extLst xmlns:a="http://schemas.openxmlformats.org/drawingml/2006/main">
               <a:ext uri="{FF2B5EF4-FFF2-40B4-BE49-F238E27FC236}">
-                <a16:creationId xmlns:a16="http://schemas.microsoft.com/office/drawing/2014/main" id="{0AF05239-6950-4626-BB9B-CC4F2CF3241D}"/>
+                <a16:creationId xmlns:a16="http://schemas.microsoft.com/office/drawing/2014/main" id="{9E7499BB-0873-4014-A267-CB92C18FAB90}"/>
               </a:ext>
             </a:extLst>
           </p:cNvPr>
@@ -5182,7 +5182,7 @@
           <p:cNvPr id="19" name="">
             <a:extLst xmlns:a="http://schemas.openxmlformats.org/drawingml/2006/main">
               <a:ext uri="{FF2B5EF4-FFF2-40B4-BE49-F238E27FC236}">
-                <a16:creationId xmlns:a16="http://schemas.microsoft.com/office/drawing/2014/main" id="{E79F15D1-77FA-452C-820D-F17EB8EB4D4C}"/>
+                <a16:creationId xmlns:a16="http://schemas.microsoft.com/office/drawing/2014/main" id="{A1E8B74D-C5B8-401D-837E-46EFCD55C7DE}"/>
               </a:ext>
             </a:extLst>
           </p:cNvPr>
@@ -5214,7 +5214,7 @@
           <p:cNvPr id="20" name="">
             <a:extLst xmlns:a="http://schemas.openxmlformats.org/drawingml/2006/main">
               <a:ext uri="{FF2B5EF4-FFF2-40B4-BE49-F238E27FC236}">
-                <a16:creationId xmlns:a16="http://schemas.microsoft.com/office/drawing/2014/main" id="{77B1DB48-5070-4D48-8FF6-8A5F5FB8BBD8}"/>
+                <a16:creationId xmlns:a16="http://schemas.microsoft.com/office/drawing/2014/main" id="{289A9666-C4CB-4694-A136-86B3B5695A46}"/>
               </a:ext>
             </a:extLst>
           </p:cNvPr>
@@ -5271,7 +5271,7 @@
           <p:cNvPr id="21" name="">
             <a:extLst xmlns:a="http://schemas.openxmlformats.org/drawingml/2006/main">
               <a:ext uri="{FF2B5EF4-FFF2-40B4-BE49-F238E27FC236}">
-                <a16:creationId xmlns:a16="http://schemas.microsoft.com/office/drawing/2014/main" id="{D02C6244-ED0C-40EA-A870-540E257DB8AF}"/>
+                <a16:creationId xmlns:a16="http://schemas.microsoft.com/office/drawing/2014/main" id="{83A96ACB-79A9-4B1D-8D2C-03115680F9B2}"/>
               </a:ext>
             </a:extLst>
           </p:cNvPr>
@@ -5328,7 +5328,7 @@
           <p:cNvPr id="22" name="">
             <a:extLst xmlns:a="http://schemas.openxmlformats.org/drawingml/2006/main">
               <a:ext uri="{FF2B5EF4-FFF2-40B4-BE49-F238E27FC236}">
-                <a16:creationId xmlns:a16="http://schemas.microsoft.com/office/drawing/2014/main" id="{EE71F285-6FEB-45AB-9596-6EA089214E96}"/>
+                <a16:creationId xmlns:a16="http://schemas.microsoft.com/office/drawing/2014/main" id="{25A22A61-8D69-4D7E-880F-6EE4F2EA9488}"/>
               </a:ext>
             </a:extLst>
           </p:cNvPr>
@@ -5383,7 +5383,7 @@
     </p:spTree>
     <p:extLst>
       <p:ext uri="{BB962C8B-B14F-4D97-AF65-F5344CB8AC3E}">
-        <p14:creationId xmlns:p14="http://schemas.microsoft.com/office/powerpoint/2010/main" val="1496345651"/>
+        <p14:creationId xmlns:p14="http://schemas.microsoft.com/office/powerpoint/2010/main" val="634403026"/>
       </p:ext>
     </p:extLst>
   </p:cSld>
@@ -5584,7 +5584,7 @@
           <p:cNvPr id="23" name="">
             <a:extLst xmlns:a="http://schemas.openxmlformats.org/drawingml/2006/main">
               <a:ext uri="{FF2B5EF4-FFF2-40B4-BE49-F238E27FC236}">
-                <a16:creationId xmlns:a16="http://schemas.microsoft.com/office/drawing/2014/main" id="{C15B3BDE-0F05-40EC-B7CE-2FFA376EDC9C}"/>
+                <a16:creationId xmlns:a16="http://schemas.microsoft.com/office/drawing/2014/main" id="{93F4BB51-983E-463E-8B7A-29FD65E38CAF}"/>
               </a:ext>
             </a:extLst>
           </p:cNvPr>
@@ -5616,7 +5616,7 @@
           <p:cNvPr id="2" name="">
             <a:extLst xmlns:a="http://schemas.openxmlformats.org/drawingml/2006/main">
               <a:ext uri="{FF2B5EF4-FFF2-40B4-BE49-F238E27FC236}">
-                <a16:creationId xmlns:a16="http://schemas.microsoft.com/office/drawing/2014/main" id="{907A6431-1FCC-4AC7-9F5D-B08214294AD4}"/>
+                <a16:creationId xmlns:a16="http://schemas.microsoft.com/office/drawing/2014/main" id="{764F89B0-A789-4B56-A778-93C4B568100E}"/>
               </a:ext>
             </a:extLst>
           </p:cNvPr>
@@ -5673,7 +5673,7 @@
           <p:cNvPr id="3" name="">
             <a:extLst xmlns:a="http://schemas.openxmlformats.org/drawingml/2006/main">
               <a:ext uri="{FF2B5EF4-FFF2-40B4-BE49-F238E27FC236}">
-                <a16:creationId xmlns:a16="http://schemas.microsoft.com/office/drawing/2014/main" id="{67899C94-BAD6-4077-9915-6CB20CB46787}"/>
+                <a16:creationId xmlns:a16="http://schemas.microsoft.com/office/drawing/2014/main" id="{1544060F-B106-4568-823A-8D3DC79B9313}"/>
               </a:ext>
             </a:extLst>
           </p:cNvPr>
@@ -5705,7 +5705,7 @@
           <p:cNvPr id="4" name="">
             <a:extLst xmlns:a="http://schemas.openxmlformats.org/drawingml/2006/main">
               <a:ext uri="{FF2B5EF4-FFF2-40B4-BE49-F238E27FC236}">
-                <a16:creationId xmlns:a16="http://schemas.microsoft.com/office/drawing/2014/main" id="{DF861A1A-7B22-446C-84ED-97CF69374C2F}"/>
+                <a16:creationId xmlns:a16="http://schemas.microsoft.com/office/drawing/2014/main" id="{7D9F1703-1FFB-45B4-B6F9-D77DE75C9C8D}"/>
               </a:ext>
             </a:extLst>
           </p:cNvPr>
@@ -5762,7 +5762,7 @@
           <p:cNvPr id="5" name="">
             <a:extLst xmlns:a="http://schemas.openxmlformats.org/drawingml/2006/main">
               <a:ext uri="{FF2B5EF4-FFF2-40B4-BE49-F238E27FC236}">
-                <a16:creationId xmlns:a16="http://schemas.microsoft.com/office/drawing/2014/main" id="{2A0F1C74-C08B-4A89-9449-091469B56E16}"/>
+                <a16:creationId xmlns:a16="http://schemas.microsoft.com/office/drawing/2014/main" id="{28BE7653-00AE-4D8C-AD3C-98D19717D6CA}"/>
               </a:ext>
             </a:extLst>
           </p:cNvPr>
@@ -5819,7 +5819,7 @@
           <p:cNvPr id="6" name="">
             <a:extLst xmlns:a="http://schemas.openxmlformats.org/drawingml/2006/main">
               <a:ext uri="{FF2B5EF4-FFF2-40B4-BE49-F238E27FC236}">
-                <a16:creationId xmlns:a16="http://schemas.microsoft.com/office/drawing/2014/main" id="{0DAE7B8E-B13A-43DB-B7FB-4CD6DEB1D3D8}"/>
+                <a16:creationId xmlns:a16="http://schemas.microsoft.com/office/drawing/2014/main" id="{549F22D3-B67A-4D5E-A264-258892C1F13C}"/>
               </a:ext>
             </a:extLst>
           </p:cNvPr>
@@ -5876,7 +5876,7 @@
           <p:cNvPr id="7" name="">
             <a:extLst xmlns:a="http://schemas.openxmlformats.org/drawingml/2006/main">
               <a:ext uri="{FF2B5EF4-FFF2-40B4-BE49-F238E27FC236}">
-                <a16:creationId xmlns:a16="http://schemas.microsoft.com/office/drawing/2014/main" id="{0797D04C-40EE-46AE-A5FA-7BF2C6BBAECF}"/>
+                <a16:creationId xmlns:a16="http://schemas.microsoft.com/office/drawing/2014/main" id="{7E17E473-FE34-4F2D-ACAB-F6081B9E3DC0}"/>
               </a:ext>
             </a:extLst>
           </p:cNvPr>
@@ -5908,7 +5908,7 @@
           <p:cNvPr id="8" name="">
             <a:extLst xmlns:a="http://schemas.openxmlformats.org/drawingml/2006/main">
               <a:ext uri="{FF2B5EF4-FFF2-40B4-BE49-F238E27FC236}">
-                <a16:creationId xmlns:a16="http://schemas.microsoft.com/office/drawing/2014/main" id="{DF31330F-87A1-4B40-BE2D-4BB5DEDB4309}"/>
+                <a16:creationId xmlns:a16="http://schemas.microsoft.com/office/drawing/2014/main" id="{9A89D8A7-DEA3-4685-95C0-995999B7E0BB}"/>
               </a:ext>
             </a:extLst>
           </p:cNvPr>
@@ -5965,7 +5965,7 @@
           <p:cNvPr id="9" name="">
             <a:extLst xmlns:a="http://schemas.openxmlformats.org/drawingml/2006/main">
               <a:ext uri="{FF2B5EF4-FFF2-40B4-BE49-F238E27FC236}">
-                <a16:creationId xmlns:a16="http://schemas.microsoft.com/office/drawing/2014/main" id="{3ECF4427-9D38-4948-89D9-52C8C0D1A283}"/>
+                <a16:creationId xmlns:a16="http://schemas.microsoft.com/office/drawing/2014/main" id="{FF878AAB-13B8-4508-9600-7584A4DE3F08}"/>
               </a:ext>
             </a:extLst>
           </p:cNvPr>
@@ -6022,7 +6022,7 @@
           <p:cNvPr id="10" name="">
             <a:extLst xmlns:a="http://schemas.openxmlformats.org/drawingml/2006/main">
               <a:ext uri="{FF2B5EF4-FFF2-40B4-BE49-F238E27FC236}">
-                <a16:creationId xmlns:a16="http://schemas.microsoft.com/office/drawing/2014/main" id="{A91DA49C-03B5-45EE-9326-697C7F1B350F}"/>
+                <a16:creationId xmlns:a16="http://schemas.microsoft.com/office/drawing/2014/main" id="{88494619-6B12-45E6-867E-68755D1D9C57}"/>
               </a:ext>
             </a:extLst>
           </p:cNvPr>
@@ -6056,7 +6056,7 @@
           <p:cNvPr id="11" name="">
             <a:extLst xmlns:a="http://schemas.openxmlformats.org/drawingml/2006/main">
               <a:ext uri="{FF2B5EF4-FFF2-40B4-BE49-F238E27FC236}">
-                <a16:creationId xmlns:a16="http://schemas.microsoft.com/office/drawing/2014/main" id="{DD01C604-EC3F-4FB1-BB7A-5B0C1736BE2F}"/>
+                <a16:creationId xmlns:a16="http://schemas.microsoft.com/office/drawing/2014/main" id="{640CA7FE-9AC8-4591-ABA6-7B6608F4AFC8}"/>
               </a:ext>
             </a:extLst>
           </p:cNvPr>
@@ -6088,7 +6088,7 @@
           <p:cNvPr id="12" name="">
             <a:extLst xmlns:a="http://schemas.openxmlformats.org/drawingml/2006/main">
               <a:ext uri="{FF2B5EF4-FFF2-40B4-BE49-F238E27FC236}">
-                <a16:creationId xmlns:a16="http://schemas.microsoft.com/office/drawing/2014/main" id="{F0E34579-A94D-4DFD-B8A5-4ECC49AD593E}"/>
+                <a16:creationId xmlns:a16="http://schemas.microsoft.com/office/drawing/2014/main" id="{972AB2FD-C393-41B7-802A-8FACC8165F72}"/>
               </a:ext>
             </a:extLst>
           </p:cNvPr>
@@ -6145,7 +6145,7 @@
           <p:cNvPr id="13" name="">
             <a:extLst xmlns:a="http://schemas.openxmlformats.org/drawingml/2006/main">
               <a:ext uri="{FF2B5EF4-FFF2-40B4-BE49-F238E27FC236}">
-                <a16:creationId xmlns:a16="http://schemas.microsoft.com/office/drawing/2014/main" id="{7BA55924-1249-4DB6-BA9C-BDE55EBCDFC7}"/>
+                <a16:creationId xmlns:a16="http://schemas.microsoft.com/office/drawing/2014/main" id="{EE10B70F-675D-4B17-8B4D-177BF649014C}"/>
               </a:ext>
             </a:extLst>
           </p:cNvPr>
@@ -6202,7 +6202,7 @@
           <p:cNvPr id="14" name="">
             <a:extLst xmlns:a="http://schemas.openxmlformats.org/drawingml/2006/main">
               <a:ext uri="{FF2B5EF4-FFF2-40B4-BE49-F238E27FC236}">
-                <a16:creationId xmlns:a16="http://schemas.microsoft.com/office/drawing/2014/main" id="{5190475C-1367-40C5-8DE9-08DF5B19B211}"/>
+                <a16:creationId xmlns:a16="http://schemas.microsoft.com/office/drawing/2014/main" id="{C8F1ED64-06D9-471F-84A6-720B9F3DDEAE}"/>
               </a:ext>
             </a:extLst>
           </p:cNvPr>
@@ -6236,7 +6236,7 @@
           <p:cNvPr id="15" name="">
             <a:extLst xmlns:a="http://schemas.openxmlformats.org/drawingml/2006/main">
               <a:ext uri="{FF2B5EF4-FFF2-40B4-BE49-F238E27FC236}">
-                <a16:creationId xmlns:a16="http://schemas.microsoft.com/office/drawing/2014/main" id="{16A517C1-429E-4099-B092-189060835264}"/>
+                <a16:creationId xmlns:a16="http://schemas.microsoft.com/office/drawing/2014/main" id="{9DF5AC2C-9040-44B9-8074-EFAE18A64BF7}"/>
               </a:ext>
             </a:extLst>
           </p:cNvPr>
@@ -6268,7 +6268,7 @@
           <p:cNvPr id="16" name="">
             <a:extLst xmlns:a="http://schemas.openxmlformats.org/drawingml/2006/main">
               <a:ext uri="{FF2B5EF4-FFF2-40B4-BE49-F238E27FC236}">
-                <a16:creationId xmlns:a16="http://schemas.microsoft.com/office/drawing/2014/main" id="{62B8CC05-A3A4-4642-8CD3-8B057A948AF2}"/>
+                <a16:creationId xmlns:a16="http://schemas.microsoft.com/office/drawing/2014/main" id="{424A6F1C-4C92-47EF-AAD8-B027C5AA9599}"/>
               </a:ext>
             </a:extLst>
           </p:cNvPr>
@@ -6325,7 +6325,7 @@
           <p:cNvPr id="17" name="">
             <a:extLst xmlns:a="http://schemas.openxmlformats.org/drawingml/2006/main">
               <a:ext uri="{FF2B5EF4-FFF2-40B4-BE49-F238E27FC236}">
-                <a16:creationId xmlns:a16="http://schemas.microsoft.com/office/drawing/2014/main" id="{D9FFCD60-CFD8-4531-A5F8-F068B3B2C68F}"/>
+                <a16:creationId xmlns:a16="http://schemas.microsoft.com/office/drawing/2014/main" id="{DAC755CA-97E4-4BD8-A588-17B3C7AF86BE}"/>
               </a:ext>
             </a:extLst>
           </p:cNvPr>
@@ -6382,7 +6382,7 @@
           <p:cNvPr id="18" name="">
             <a:extLst xmlns:a="http://schemas.openxmlformats.org/drawingml/2006/main">
               <a:ext uri="{FF2B5EF4-FFF2-40B4-BE49-F238E27FC236}">
-                <a16:creationId xmlns:a16="http://schemas.microsoft.com/office/drawing/2014/main" id="{F24F3CC8-35A7-49B4-8365-2E3E09B390B0}"/>
+                <a16:creationId xmlns:a16="http://schemas.microsoft.com/office/drawing/2014/main" id="{015C1053-D87D-4A34-8F2D-6696E12DC132}"/>
               </a:ext>
             </a:extLst>
           </p:cNvPr>
@@ -6416,7 +6416,7 @@
           <p:cNvPr id="19" name="">
             <a:extLst xmlns:a="http://schemas.openxmlformats.org/drawingml/2006/main">
               <a:ext uri="{FF2B5EF4-FFF2-40B4-BE49-F238E27FC236}">
-                <a16:creationId xmlns:a16="http://schemas.microsoft.com/office/drawing/2014/main" id="{859CF5FA-AFC8-47BE-AB8F-F7299F383957}"/>
+                <a16:creationId xmlns:a16="http://schemas.microsoft.com/office/drawing/2014/main" id="{D1AAC570-3B4E-4CA6-924D-D494BEF33A65}"/>
               </a:ext>
             </a:extLst>
           </p:cNvPr>
@@ -6448,7 +6448,7 @@
           <p:cNvPr id="20" name="">
             <a:extLst xmlns:a="http://schemas.openxmlformats.org/drawingml/2006/main">
               <a:ext uri="{FF2B5EF4-FFF2-40B4-BE49-F238E27FC236}">
-                <a16:creationId xmlns:a16="http://schemas.microsoft.com/office/drawing/2014/main" id="{024F12CC-3A5E-417C-80A7-FF004F52EBC3}"/>
+                <a16:creationId xmlns:a16="http://schemas.microsoft.com/office/drawing/2014/main" id="{7E637185-8C86-4ED8-8898-76C3149AE95D}"/>
               </a:ext>
             </a:extLst>
           </p:cNvPr>
@@ -6505,7 +6505,7 @@
           <p:cNvPr id="21" name="">
             <a:extLst xmlns:a="http://schemas.openxmlformats.org/drawingml/2006/main">
               <a:ext uri="{FF2B5EF4-FFF2-40B4-BE49-F238E27FC236}">
-                <a16:creationId xmlns:a16="http://schemas.microsoft.com/office/drawing/2014/main" id="{004B03B9-D801-4006-B560-A3FEA3815939}"/>
+                <a16:creationId xmlns:a16="http://schemas.microsoft.com/office/drawing/2014/main" id="{F905FE20-1625-4A7A-94B6-B1F7D2A7A7B6}"/>
               </a:ext>
             </a:extLst>
           </p:cNvPr>
@@ -6562,7 +6562,7 @@
           <p:cNvPr id="22" name="">
             <a:extLst xmlns:a="http://schemas.openxmlformats.org/drawingml/2006/main">
               <a:ext uri="{FF2B5EF4-FFF2-40B4-BE49-F238E27FC236}">
-                <a16:creationId xmlns:a16="http://schemas.microsoft.com/office/drawing/2014/main" id="{5F723B79-181D-4797-A313-B8A15ADD90A1}"/>
+                <a16:creationId xmlns:a16="http://schemas.microsoft.com/office/drawing/2014/main" id="{2D6ABAD5-82C1-402A-B821-A19C86373A5B}"/>
               </a:ext>
             </a:extLst>
           </p:cNvPr>
@@ -6617,7 +6617,7 @@
     </p:spTree>
     <p:extLst>
       <p:ext uri="{BB962C8B-B14F-4D97-AF65-F5344CB8AC3E}">
-        <p14:creationId xmlns:p14="http://schemas.microsoft.com/office/powerpoint/2010/main" val="653450032"/>
+        <p14:creationId xmlns:p14="http://schemas.microsoft.com/office/powerpoint/2010/main" val="1214239691"/>
       </p:ext>
     </p:extLst>
   </p:cSld>
@@ -6818,7 +6818,7 @@
           <p:cNvPr id="16" name="">
             <a:extLst xmlns:a="http://schemas.openxmlformats.org/drawingml/2006/main">
               <a:ext uri="{FF2B5EF4-FFF2-40B4-BE49-F238E27FC236}">
-                <a16:creationId xmlns:a16="http://schemas.microsoft.com/office/drawing/2014/main" id="{3EF01201-DD8F-4BF8-BD7B-92F5131546AB}"/>
+                <a16:creationId xmlns:a16="http://schemas.microsoft.com/office/drawing/2014/main" id="{836A1CB3-595C-4F85-9874-030F7B7F3A5E}"/>
               </a:ext>
             </a:extLst>
           </p:cNvPr>
@@ -6850,7 +6850,7 @@
           <p:cNvPr id="2" name="">
             <a:extLst xmlns:a="http://schemas.openxmlformats.org/drawingml/2006/main">
               <a:ext uri="{FF2B5EF4-FFF2-40B4-BE49-F238E27FC236}">
-                <a16:creationId xmlns:a16="http://schemas.microsoft.com/office/drawing/2014/main" id="{AA09BC60-C6F5-4DBF-8CA9-C2CCCC951D42}"/>
+                <a16:creationId xmlns:a16="http://schemas.microsoft.com/office/drawing/2014/main" id="{8F0F3F66-54AA-45F7-8DC8-2B9EFE5F53AE}"/>
               </a:ext>
             </a:extLst>
           </p:cNvPr>
@@ -6907,7 +6907,7 @@
           <p:cNvPr id="3" name="">
             <a:extLst xmlns:a="http://schemas.openxmlformats.org/drawingml/2006/main">
               <a:ext uri="{FF2B5EF4-FFF2-40B4-BE49-F238E27FC236}">
-                <a16:creationId xmlns:a16="http://schemas.microsoft.com/office/drawing/2014/main" id="{859D2B67-4189-432A-B3B5-3AC8001F5244}"/>
+                <a16:creationId xmlns:a16="http://schemas.microsoft.com/office/drawing/2014/main" id="{C0E44AF6-614A-4261-B8EE-5D5997D9B1AE}"/>
               </a:ext>
             </a:extLst>
           </p:cNvPr>
@@ -6939,7 +6939,7 @@
           <p:cNvPr id="4" name="">
             <a:extLst xmlns:a="http://schemas.openxmlformats.org/drawingml/2006/main">
               <a:ext uri="{FF2B5EF4-FFF2-40B4-BE49-F238E27FC236}">
-                <a16:creationId xmlns:a16="http://schemas.microsoft.com/office/drawing/2014/main" id="{7BFB994D-6295-42C6-907F-78B692320541}"/>
+                <a16:creationId xmlns:a16="http://schemas.microsoft.com/office/drawing/2014/main" id="{CE7EE17E-B107-4E42-B42F-6CB591C155B0}"/>
               </a:ext>
             </a:extLst>
           </p:cNvPr>
@@ -6996,7 +6996,7 @@
           <p:cNvPr id="5" name="">
             <a:extLst xmlns:a="http://schemas.openxmlformats.org/drawingml/2006/main">
               <a:ext uri="{FF2B5EF4-FFF2-40B4-BE49-F238E27FC236}">
-                <a16:creationId xmlns:a16="http://schemas.microsoft.com/office/drawing/2014/main" id="{4A7C3D6B-90B4-4F4B-8263-AD12124F9904}"/>
+                <a16:creationId xmlns:a16="http://schemas.microsoft.com/office/drawing/2014/main" id="{EC820BD8-645E-4B45-AD8C-5D424FA093F4}"/>
               </a:ext>
             </a:extLst>
           </p:cNvPr>
@@ -7053,7 +7053,7 @@
           <p:cNvPr id="6" name="">
             <a:extLst xmlns:a="http://schemas.openxmlformats.org/drawingml/2006/main">
               <a:ext uri="{FF2B5EF4-FFF2-40B4-BE49-F238E27FC236}">
-                <a16:creationId xmlns:a16="http://schemas.microsoft.com/office/drawing/2014/main" id="{2E152F65-0A03-4FDD-87C9-01ED14B5C5DD}"/>
+                <a16:creationId xmlns:a16="http://schemas.microsoft.com/office/drawing/2014/main" id="{5CBFFFEF-A08E-4DF7-A9C9-4868C99EC6C0}"/>
               </a:ext>
             </a:extLst>
           </p:cNvPr>
@@ -7110,7 +7110,7 @@
           <p:cNvPr id="7" name="">
             <a:extLst xmlns:a="http://schemas.openxmlformats.org/drawingml/2006/main">
               <a:ext uri="{FF2B5EF4-FFF2-40B4-BE49-F238E27FC236}">
-                <a16:creationId xmlns:a16="http://schemas.microsoft.com/office/drawing/2014/main" id="{87560BEA-69AA-4E48-8547-0D8FCA348D0A}"/>
+                <a16:creationId xmlns:a16="http://schemas.microsoft.com/office/drawing/2014/main" id="{0A446EE2-12ED-4A2E-9690-754C9EC2511A}"/>
               </a:ext>
             </a:extLst>
           </p:cNvPr>
@@ -7142,7 +7142,7 @@
           <p:cNvPr id="8" name="">
             <a:extLst xmlns:a="http://schemas.openxmlformats.org/drawingml/2006/main">
               <a:ext uri="{FF2B5EF4-FFF2-40B4-BE49-F238E27FC236}">
-                <a16:creationId xmlns:a16="http://schemas.microsoft.com/office/drawing/2014/main" id="{081AE051-A1ED-4D94-B7BF-D4FEDF6D52A6}"/>
+                <a16:creationId xmlns:a16="http://schemas.microsoft.com/office/drawing/2014/main" id="{D3261320-8162-4192-91C5-1A1BCD5EC102}"/>
               </a:ext>
             </a:extLst>
           </p:cNvPr>
@@ -7199,7 +7199,7 @@
           <p:cNvPr id="9" name="">
             <a:extLst xmlns:a="http://schemas.openxmlformats.org/drawingml/2006/main">
               <a:ext uri="{FF2B5EF4-FFF2-40B4-BE49-F238E27FC236}">
-                <a16:creationId xmlns:a16="http://schemas.microsoft.com/office/drawing/2014/main" id="{AF310555-4C26-4293-839B-354F37C33841}"/>
+                <a16:creationId xmlns:a16="http://schemas.microsoft.com/office/drawing/2014/main" id="{C0047B45-B7E7-47CC-85BB-C40B54D9D771}"/>
               </a:ext>
             </a:extLst>
           </p:cNvPr>
@@ -7256,7 +7256,7 @@
           <p:cNvPr id="10" name="">
             <a:extLst xmlns:a="http://schemas.openxmlformats.org/drawingml/2006/main">
               <a:ext uri="{FF2B5EF4-FFF2-40B4-BE49-F238E27FC236}">
-                <a16:creationId xmlns:a16="http://schemas.microsoft.com/office/drawing/2014/main" id="{2E00E28B-3F31-43CD-924C-5C2EC715FDF7}"/>
+                <a16:creationId xmlns:a16="http://schemas.microsoft.com/office/drawing/2014/main" id="{569B7A06-6656-42D0-BB72-FDFDC1C39CC1}"/>
               </a:ext>
             </a:extLst>
           </p:cNvPr>
@@ -7313,7 +7313,7 @@
           <p:cNvPr id="11" name="">
             <a:extLst xmlns:a="http://schemas.openxmlformats.org/drawingml/2006/main">
               <a:ext uri="{FF2B5EF4-FFF2-40B4-BE49-F238E27FC236}">
-                <a16:creationId xmlns:a16="http://schemas.microsoft.com/office/drawing/2014/main" id="{D5BD6AEF-62D5-483C-90EB-35D7BFA645D9}"/>
+                <a16:creationId xmlns:a16="http://schemas.microsoft.com/office/drawing/2014/main" id="{F3742B91-9D4D-4A5C-B3BE-60DED051F19B}"/>
               </a:ext>
             </a:extLst>
           </p:cNvPr>
@@ -7345,7 +7345,7 @@
           <p:cNvPr id="12" name="">
             <a:extLst xmlns:a="http://schemas.openxmlformats.org/drawingml/2006/main">
               <a:ext uri="{FF2B5EF4-FFF2-40B4-BE49-F238E27FC236}">
-                <a16:creationId xmlns:a16="http://schemas.microsoft.com/office/drawing/2014/main" id="{17F84598-9317-401C-B1BF-C970B65C9CB2}"/>
+                <a16:creationId xmlns:a16="http://schemas.microsoft.com/office/drawing/2014/main" id="{FA6E1E47-77B2-4454-B7AE-87043C07C640}"/>
               </a:ext>
             </a:extLst>
           </p:cNvPr>
@@ -7402,7 +7402,7 @@
           <p:cNvPr id="13" name="">
             <a:extLst xmlns:a="http://schemas.openxmlformats.org/drawingml/2006/main">
               <a:ext uri="{FF2B5EF4-FFF2-40B4-BE49-F238E27FC236}">
-                <a16:creationId xmlns:a16="http://schemas.microsoft.com/office/drawing/2014/main" id="{FF0B1184-3A43-444D-8A31-5F54124E06CD}"/>
+                <a16:creationId xmlns:a16="http://schemas.microsoft.com/office/drawing/2014/main" id="{33D7146E-615B-4621-96F7-0A030F64FA5A}"/>
               </a:ext>
             </a:extLst>
           </p:cNvPr>
@@ -7459,7 +7459,7 @@
           <p:cNvPr id="14" name="">
             <a:extLst xmlns:a="http://schemas.openxmlformats.org/drawingml/2006/main">
               <a:ext uri="{FF2B5EF4-FFF2-40B4-BE49-F238E27FC236}">
-                <a16:creationId xmlns:a16="http://schemas.microsoft.com/office/drawing/2014/main" id="{30FC94AC-8ACA-4A69-9A86-B697B0DA0F50}"/>
+                <a16:creationId xmlns:a16="http://schemas.microsoft.com/office/drawing/2014/main" id="{3EA766FB-50CB-422F-AF06-A49439F15E03}"/>
               </a:ext>
             </a:extLst>
           </p:cNvPr>
@@ -7516,7 +7516,7 @@
           <p:cNvPr id="15" name="">
             <a:extLst xmlns:a="http://schemas.openxmlformats.org/drawingml/2006/main">
               <a:ext uri="{FF2B5EF4-FFF2-40B4-BE49-F238E27FC236}">
-                <a16:creationId xmlns:a16="http://schemas.microsoft.com/office/drawing/2014/main" id="{2DBDF3C5-AB8F-40DD-87D0-C6E3E82A5867}"/>
+                <a16:creationId xmlns:a16="http://schemas.microsoft.com/office/drawing/2014/main" id="{98BED1DC-5133-4546-B52A-D1B6C3AA01A4}"/>
               </a:ext>
             </a:extLst>
           </p:cNvPr>
@@ -7571,7 +7571,7 @@
     </p:spTree>
     <p:extLst>
       <p:ext uri="{BB962C8B-B14F-4D97-AF65-F5344CB8AC3E}">
-        <p14:creationId xmlns:p14="http://schemas.microsoft.com/office/powerpoint/2010/main" val="694315466"/>
+        <p14:creationId xmlns:p14="http://schemas.microsoft.com/office/powerpoint/2010/main" val="552265660"/>
       </p:ext>
     </p:extLst>
   </p:cSld>
@@ -7769,10 +7769,10 @@
       </p:grpSpPr>
       <p:sp>
         <p:nvSpPr>
-          <p:cNvPr id="23" name="">
-            <a:extLst xmlns:a="http://schemas.openxmlformats.org/drawingml/2006/main">
-              <a:ext uri="{FF2B5EF4-FFF2-40B4-BE49-F238E27FC236}">
-                <a16:creationId xmlns:a16="http://schemas.microsoft.com/office/drawing/2014/main" id="{A796D337-C6F6-41A1-8EB2-E678BE73508E}"/>
+          <p:cNvPr id="26" name="">
+            <a:extLst xmlns:a="http://schemas.openxmlformats.org/drawingml/2006/main">
+              <a:ext uri="{FF2B5EF4-FFF2-40B4-BE49-F238E27FC236}">
+                <a16:creationId xmlns:a16="http://schemas.microsoft.com/office/drawing/2014/main" id="{DFAC50C5-8AEA-4C2E-B08C-D54C05470F11}"/>
               </a:ext>
             </a:extLst>
           </p:cNvPr>
@@ -7804,7 +7804,7 @@
           <p:cNvPr id="2" name="">
             <a:extLst xmlns:a="http://schemas.openxmlformats.org/drawingml/2006/main">
               <a:ext uri="{FF2B5EF4-FFF2-40B4-BE49-F238E27FC236}">
-                <a16:creationId xmlns:a16="http://schemas.microsoft.com/office/drawing/2014/main" id="{9FA5FB61-860E-41C0-95A2-B732DEC3E866}"/>
+                <a16:creationId xmlns:a16="http://schemas.microsoft.com/office/drawing/2014/main" id="{54B7DD7F-6F24-4FC2-AE50-4B2925397853}"/>
               </a:ext>
             </a:extLst>
           </p:cNvPr>
@@ -7861,7 +7861,7 @@
           <p:cNvPr id="3" name="">
             <a:extLst xmlns:a="http://schemas.openxmlformats.org/drawingml/2006/main">
               <a:ext uri="{FF2B5EF4-FFF2-40B4-BE49-F238E27FC236}">
-                <a16:creationId xmlns:a16="http://schemas.microsoft.com/office/drawing/2014/main" id="{090289D3-DAC9-45CF-BDA6-72E6C6832222}"/>
+                <a16:creationId xmlns:a16="http://schemas.microsoft.com/office/drawing/2014/main" id="{87BCC650-8048-4215-ACC8-D172C504B827}"/>
               </a:ext>
             </a:extLst>
           </p:cNvPr>
@@ -7893,7 +7893,7 @@
           <p:cNvPr id="4" name="">
             <a:extLst xmlns:a="http://schemas.openxmlformats.org/drawingml/2006/main">
               <a:ext uri="{FF2B5EF4-FFF2-40B4-BE49-F238E27FC236}">
-                <a16:creationId xmlns:a16="http://schemas.microsoft.com/office/drawing/2014/main" id="{D9C849CE-182F-4960-BF2D-FDCE41F6ECFE}"/>
+                <a16:creationId xmlns:a16="http://schemas.microsoft.com/office/drawing/2014/main" id="{9BFF2039-B195-4E08-9CA8-6B29A949A954}"/>
               </a:ext>
             </a:extLst>
           </p:cNvPr>
@@ -7950,7 +7950,7 @@
           <p:cNvPr id="5" name="">
             <a:extLst xmlns:a="http://schemas.openxmlformats.org/drawingml/2006/main">
               <a:ext uri="{FF2B5EF4-FFF2-40B4-BE49-F238E27FC236}">
-                <a16:creationId xmlns:a16="http://schemas.microsoft.com/office/drawing/2014/main" id="{967FF9FA-887B-4C1E-AE02-6F6B7C243CA3}"/>
+                <a16:creationId xmlns:a16="http://schemas.microsoft.com/office/drawing/2014/main" id="{831BD86C-DB56-46C7-9B1B-E713325BD7A4}"/>
               </a:ext>
             </a:extLst>
           </p:cNvPr>
@@ -8007,7 +8007,7 @@
           <p:cNvPr id="6" name="">
             <a:extLst xmlns:a="http://schemas.openxmlformats.org/drawingml/2006/main">
               <a:ext uri="{FF2B5EF4-FFF2-40B4-BE49-F238E27FC236}">
-                <a16:creationId xmlns:a16="http://schemas.microsoft.com/office/drawing/2014/main" id="{3D27E9B8-C0E7-4606-8159-8B295B3BEA3C}"/>
+                <a16:creationId xmlns:a16="http://schemas.microsoft.com/office/drawing/2014/main" id="{90828C62-28CC-4265-A029-91A16115813A}"/>
               </a:ext>
             </a:extLst>
           </p:cNvPr>
@@ -8064,7 +8064,7 @@
           <p:cNvPr id="7" name="">
             <a:extLst xmlns:a="http://schemas.openxmlformats.org/drawingml/2006/main">
               <a:ext uri="{FF2B5EF4-FFF2-40B4-BE49-F238E27FC236}">
-                <a16:creationId xmlns:a16="http://schemas.microsoft.com/office/drawing/2014/main" id="{58512C49-BCAE-4647-8430-80B07E99C5C1}"/>
+                <a16:creationId xmlns:a16="http://schemas.microsoft.com/office/drawing/2014/main" id="{5DD2AB5C-46CE-4B23-9F84-9F26AD78D2AC}"/>
               </a:ext>
             </a:extLst>
           </p:cNvPr>
@@ -8096,7 +8096,7 @@
           <p:cNvPr id="8" name="">
             <a:extLst xmlns:a="http://schemas.openxmlformats.org/drawingml/2006/main">
               <a:ext uri="{FF2B5EF4-FFF2-40B4-BE49-F238E27FC236}">
-                <a16:creationId xmlns:a16="http://schemas.microsoft.com/office/drawing/2014/main" id="{56DDBCE2-FFE0-446F-A1AB-3333788AEA2B}"/>
+                <a16:creationId xmlns:a16="http://schemas.microsoft.com/office/drawing/2014/main" id="{4822FAF9-ABE5-41F0-B9B5-65DAD41E25AE}"/>
               </a:ext>
             </a:extLst>
           </p:cNvPr>
@@ -8153,7 +8153,7 @@
           <p:cNvPr id="9" name="">
             <a:extLst xmlns:a="http://schemas.openxmlformats.org/drawingml/2006/main">
               <a:ext uri="{FF2B5EF4-FFF2-40B4-BE49-F238E27FC236}">
-                <a16:creationId xmlns:a16="http://schemas.microsoft.com/office/drawing/2014/main" id="{40A6DE4E-694E-49AD-B2D4-3D952E8C861E}"/>
+                <a16:creationId xmlns:a16="http://schemas.microsoft.com/office/drawing/2014/main" id="{44B98143-DACC-4C59-8EA9-7BAEA19DF9CE}"/>
               </a:ext>
             </a:extLst>
           </p:cNvPr>
@@ -8210,19 +8210,19 @@
           <p:cNvPr id="10" name="">
             <a:extLst xmlns:a="http://schemas.openxmlformats.org/drawingml/2006/main">
               <a:ext uri="{FF2B5EF4-FFF2-40B4-BE49-F238E27FC236}">
-                <a16:creationId xmlns:a16="http://schemas.microsoft.com/office/drawing/2014/main" id="{FE9FB949-A983-436B-B96B-339972BB6EDC}"/>
-              </a:ext>
-            </a:extLst>
-          </p:cNvPr>
-          <p:cNvSpPr>
-            <a:spLocks xmlns:a="http://schemas.openxmlformats.org/drawingml/2006/main" noGrp="1"/>
-          </p:cNvSpPr>
-          <p:nvPr/>
-        </p:nvSpPr>
-        <p:spPr>
-          <a:xfrm xmlns:a="http://schemas.openxmlformats.org/drawingml/2006/main">
-            <a:off x="914400" y="1257300"/>
-            <a:ext cx="10363200" cy="781050"/>
+                <a16:creationId xmlns:a16="http://schemas.microsoft.com/office/drawing/2014/main" id="{602FCA75-3C2A-4B5D-AABA-3C8A5796C2F5}"/>
+              </a:ext>
+            </a:extLst>
+          </p:cNvPr>
+          <p:cNvSpPr>
+            <a:spLocks xmlns:a="http://schemas.openxmlformats.org/drawingml/2006/main" noGrp="1"/>
+          </p:cNvSpPr>
+          <p:nvPr/>
+        </p:nvSpPr>
+        <p:spPr>
+          <a:xfrm xmlns:a="http://schemas.openxmlformats.org/drawingml/2006/main">
+            <a:off x="857250" y="1219200"/>
+            <a:ext cx="10477500" cy="742950"/>
           </a:xfrm>
           <a:prstGeom xmlns:a="http://schemas.openxmlformats.org/drawingml/2006/main" prst="rect">
             <a:avLst/>
@@ -8239,7 +8239,7 @@
           <a:lstStyle xmlns:a="http://schemas.openxmlformats.org/drawingml/2006/main"/>
           <a:p xmlns:a="http://schemas.openxmlformats.org/drawingml/2006/main">
             <a:pPr algn="ctr">
-              <a:defRPr sz="2175" b="1">
+              <a:defRPr sz="2100" b="1">
                 <a:solidFill>
                   <a:srgbClr val="17253A"/>
                 </a:solidFill>
@@ -8249,7 +8249,7 @@
               </a:defRPr>
             </a:pPr>
             <a:r>
-              <a:rPr sz="2175" b="1">
+              <a:rPr sz="2100" b="1">
                 <a:solidFill>
                   <a:srgbClr val="17253A"/>
                 </a:solidFill>
@@ -8267,28 +8267,30 @@
           <p:cNvPr id="11" name="">
             <a:extLst xmlns:a="http://schemas.openxmlformats.org/drawingml/2006/main">
               <a:ext uri="{FF2B5EF4-FFF2-40B4-BE49-F238E27FC236}">
-                <a16:creationId xmlns:a16="http://schemas.microsoft.com/office/drawing/2014/main" id="{A3B923C8-2967-4E05-BDC2-6AC993652E4B}"/>
-              </a:ext>
-            </a:extLst>
-          </p:cNvPr>
-          <p:cNvSpPr>
-            <a:spLocks xmlns:a="http://schemas.openxmlformats.org/drawingml/2006/main" noGrp="1"/>
-          </p:cNvSpPr>
-          <p:nvPr/>
-        </p:nvSpPr>
-        <p:spPr>
-          <a:xfrm xmlns:a="http://schemas.openxmlformats.org/drawingml/2006/main">
-            <a:off x="1000125" y="2247900"/>
-            <a:ext cx="476250" cy="476250"/>
-          </a:xfrm>
-          <a:prstGeom xmlns:a="http://schemas.openxmlformats.org/drawingml/2006/main" prst="ellipse">
+                <a16:creationId xmlns:a16="http://schemas.microsoft.com/office/drawing/2014/main" id="{255AF429-2DC1-47C6-80AF-B169F66D95EA}"/>
+              </a:ext>
+            </a:extLst>
+          </p:cNvPr>
+          <p:cNvSpPr>
+            <a:spLocks xmlns:a="http://schemas.openxmlformats.org/drawingml/2006/main" noGrp="1"/>
+          </p:cNvSpPr>
+          <p:nvPr/>
+        </p:nvSpPr>
+        <p:spPr>
+          <a:xfrm xmlns:a="http://schemas.openxmlformats.org/drawingml/2006/main">
+            <a:off x="971550" y="2124075"/>
+            <a:ext cx="38100" cy="3524250"/>
+          </a:xfrm>
+          <a:prstGeom xmlns:a="http://schemas.openxmlformats.org/drawingml/2006/main" prst="rect">
             <a:avLst/>
           </a:prstGeom>
           <a:solidFill xmlns:a="http://schemas.openxmlformats.org/drawingml/2006/main">
-            <a:srgbClr val="18324A"/>
+            <a:srgbClr val="2C6E73"/>
           </a:solidFill>
           <a:ln xmlns:a="http://schemas.openxmlformats.org/drawingml/2006/main" w="0">
-            <a:noFill/>
+            <a:solidFill>
+              <a:srgbClr val="2C6E73"/>
+            </a:solidFill>
           </a:ln>
         </p:spPr>
       </p:sp>
@@ -8297,19 +8299,19 @@
           <p:cNvPr id="12" name="">
             <a:extLst xmlns:a="http://schemas.openxmlformats.org/drawingml/2006/main">
               <a:ext uri="{FF2B5EF4-FFF2-40B4-BE49-F238E27FC236}">
-                <a16:creationId xmlns:a16="http://schemas.microsoft.com/office/drawing/2014/main" id="{FC520038-0798-4165-BDB5-F9A46785A51F}"/>
-              </a:ext>
-            </a:extLst>
-          </p:cNvPr>
-          <p:cNvSpPr>
-            <a:spLocks xmlns:a="http://schemas.openxmlformats.org/drawingml/2006/main" noGrp="1"/>
-          </p:cNvSpPr>
-          <p:nvPr/>
-        </p:nvSpPr>
-        <p:spPr>
-          <a:xfrm xmlns:a="http://schemas.openxmlformats.org/drawingml/2006/main">
-            <a:off x="1000125" y="2276475"/>
-            <a:ext cx="476250" cy="419100"/>
+                <a16:creationId xmlns:a16="http://schemas.microsoft.com/office/drawing/2014/main" id="{8994C8E0-47D9-4761-BCE5-480D93452750}"/>
+              </a:ext>
+            </a:extLst>
+          </p:cNvPr>
+          <p:cNvSpPr>
+            <a:spLocks xmlns:a="http://schemas.openxmlformats.org/drawingml/2006/main" noGrp="1"/>
+          </p:cNvSpPr>
+          <p:nvPr/>
+        </p:nvSpPr>
+        <p:spPr>
+          <a:xfrm xmlns:a="http://schemas.openxmlformats.org/drawingml/2006/main">
+            <a:off x="1162050" y="2200275"/>
+            <a:ext cx="400050" cy="400050"/>
           </a:xfrm>
           <a:prstGeom xmlns:a="http://schemas.openxmlformats.org/drawingml/2006/main" prst="rect">
             <a:avLst/>
@@ -8326,9 +8328,9 @@
           <a:lstStyle xmlns:a="http://schemas.openxmlformats.org/drawingml/2006/main"/>
           <a:p xmlns:a="http://schemas.openxmlformats.org/drawingml/2006/main">
             <a:pPr algn="ctr">
-              <a:defRPr sz="1350" b="1">
-                <a:solidFill>
-                  <a:srgbClr val="FFFFFF"/>
+              <a:defRPr sz="1125" b="1">
+                <a:solidFill>
+                  <a:srgbClr val="2C6E73"/>
                 </a:solidFill>
                 <a:latin typeface="Arial"/>
                 <a:ea typeface="Arial"/>
@@ -8336,9 +8338,9 @@
               </a:defRPr>
             </a:pPr>
             <a:r>
-              <a:rPr sz="1350" b="1">
-                <a:solidFill>
-                  <a:srgbClr val="FFFFFF"/>
+              <a:rPr sz="1125" b="1">
+                <a:solidFill>
+                  <a:srgbClr val="2C6E73"/>
                 </a:solidFill>
                 <a:latin typeface="Arial"/>
                 <a:ea typeface="Arial"/>
@@ -8354,19 +8356,19 @@
           <p:cNvPr id="13" name="">
             <a:extLst xmlns:a="http://schemas.openxmlformats.org/drawingml/2006/main">
               <a:ext uri="{FF2B5EF4-FFF2-40B4-BE49-F238E27FC236}">
-                <a16:creationId xmlns:a16="http://schemas.microsoft.com/office/drawing/2014/main" id="{8D80B25F-D66E-4071-AC02-5C58E761CB7D}"/>
-              </a:ext>
-            </a:extLst>
-          </p:cNvPr>
-          <p:cNvSpPr>
-            <a:spLocks xmlns:a="http://schemas.openxmlformats.org/drawingml/2006/main" noGrp="1"/>
-          </p:cNvSpPr>
-          <p:nvPr/>
-        </p:nvSpPr>
-        <p:spPr>
-          <a:xfrm xmlns:a="http://schemas.openxmlformats.org/drawingml/2006/main">
-            <a:off x="1714500" y="2181225"/>
-            <a:ext cx="9429750" cy="609600"/>
+                <a16:creationId xmlns:a16="http://schemas.microsoft.com/office/drawing/2014/main" id="{BE3AAE55-2DA6-4359-962D-84D236488962}"/>
+              </a:ext>
+            </a:extLst>
+          </p:cNvPr>
+          <p:cNvSpPr>
+            <a:spLocks xmlns:a="http://schemas.openxmlformats.org/drawingml/2006/main" noGrp="1"/>
+          </p:cNvSpPr>
+          <p:nvPr/>
+        </p:nvSpPr>
+        <p:spPr>
+          <a:xfrm xmlns:a="http://schemas.openxmlformats.org/drawingml/2006/main">
+            <a:off x="1714500" y="2114550"/>
+            <a:ext cx="9525000" cy="638175"/>
           </a:xfrm>
           <a:prstGeom xmlns:a="http://schemas.openxmlformats.org/drawingml/2006/main" prst="rect">
             <a:avLst/>
@@ -8383,7 +8385,7 @@
           <a:lstStyle xmlns:a="http://schemas.openxmlformats.org/drawingml/2006/main"/>
           <a:p xmlns:a="http://schemas.openxmlformats.org/drawingml/2006/main">
             <a:pPr algn="l">
-              <a:defRPr sz="1500" b="0">
+              <a:defRPr sz="1575" b="0">
                 <a:solidFill>
                   <a:srgbClr val="17253A"/>
                 </a:solidFill>
@@ -8393,7 +8395,7 @@
               </a:defRPr>
             </a:pPr>
             <a:r>
-              <a:rPr sz="1500" b="0">
+              <a:rPr sz="1575" b="0">
                 <a:solidFill>
                   <a:srgbClr val="17253A"/>
                 </a:solidFill>
@@ -8401,7 +8403,7 @@
                 <a:ea typeface="Arial"/>
                 <a:cs typeface="Arial"/>
               </a:rPr>
-              <a:t>Identify the structure: Read the whole problem and mark the question and useful information.</a:t>
+              <a:t>48 × 125 - 3,760</a:t>
             </a:r>
           </a:p>
         </p:txBody>
@@ -8411,28 +8413,30 @@
           <p:cNvPr id="14" name="">
             <a:extLst xmlns:a="http://schemas.openxmlformats.org/drawingml/2006/main">
               <a:ext uri="{FF2B5EF4-FFF2-40B4-BE49-F238E27FC236}">
-                <a16:creationId xmlns:a16="http://schemas.microsoft.com/office/drawing/2014/main" id="{1CE1A253-C461-4EE9-AEDD-F094993076FA}"/>
-              </a:ext>
-            </a:extLst>
-          </p:cNvPr>
-          <p:cNvSpPr>
-            <a:spLocks xmlns:a="http://schemas.openxmlformats.org/drawingml/2006/main" noGrp="1"/>
-          </p:cNvSpPr>
-          <p:nvPr/>
-        </p:nvSpPr>
-        <p:spPr>
-          <a:xfrm xmlns:a="http://schemas.openxmlformats.org/drawingml/2006/main">
-            <a:off x="1000125" y="2990850"/>
-            <a:ext cx="476250" cy="476250"/>
-          </a:xfrm>
-          <a:prstGeom xmlns:a="http://schemas.openxmlformats.org/drawingml/2006/main" prst="ellipse">
+                <a16:creationId xmlns:a16="http://schemas.microsoft.com/office/drawing/2014/main" id="{62538117-2170-4B8D-9E13-9E85D87DC810}"/>
+              </a:ext>
+            </a:extLst>
+          </p:cNvPr>
+          <p:cNvSpPr>
+            <a:spLocks xmlns:a="http://schemas.openxmlformats.org/drawingml/2006/main" noGrp="1"/>
+          </p:cNvSpPr>
+          <p:nvPr/>
+        </p:nvSpPr>
+        <p:spPr>
+          <a:xfrm xmlns:a="http://schemas.openxmlformats.org/drawingml/2006/main">
+            <a:off x="1714500" y="2771775"/>
+            <a:ext cx="9334500" cy="9525"/>
+          </a:xfrm>
+          <a:prstGeom xmlns:a="http://schemas.openxmlformats.org/drawingml/2006/main" prst="rect">
             <a:avLst/>
           </a:prstGeom>
           <a:solidFill xmlns:a="http://schemas.openxmlformats.org/drawingml/2006/main">
-            <a:srgbClr val="2C6E73"/>
+            <a:srgbClr val="D9E0E6"/>
           </a:solidFill>
           <a:ln xmlns:a="http://schemas.openxmlformats.org/drawingml/2006/main" w="0">
-            <a:noFill/>
+            <a:solidFill>
+              <a:srgbClr val="D9E0E6"/>
+            </a:solidFill>
           </a:ln>
         </p:spPr>
       </p:sp>
@@ -8441,19 +8445,19 @@
           <p:cNvPr id="15" name="">
             <a:extLst xmlns:a="http://schemas.openxmlformats.org/drawingml/2006/main">
               <a:ext uri="{FF2B5EF4-FFF2-40B4-BE49-F238E27FC236}">
-                <a16:creationId xmlns:a16="http://schemas.microsoft.com/office/drawing/2014/main" id="{44FFA9DA-5E90-4CE5-86F5-FB438905A330}"/>
-              </a:ext>
-            </a:extLst>
-          </p:cNvPr>
-          <p:cNvSpPr>
-            <a:spLocks xmlns:a="http://schemas.openxmlformats.org/drawingml/2006/main" noGrp="1"/>
-          </p:cNvSpPr>
-          <p:nvPr/>
-        </p:nvSpPr>
-        <p:spPr>
-          <a:xfrm xmlns:a="http://schemas.openxmlformats.org/drawingml/2006/main">
-            <a:off x="1000125" y="3019425"/>
-            <a:ext cx="476250" cy="419100"/>
+                <a16:creationId xmlns:a16="http://schemas.microsoft.com/office/drawing/2014/main" id="{E7DC7693-1395-4453-8E8D-84F069E6AC66}"/>
+              </a:ext>
+            </a:extLst>
+          </p:cNvPr>
+          <p:cNvSpPr>
+            <a:spLocks xmlns:a="http://schemas.openxmlformats.org/drawingml/2006/main" noGrp="1"/>
+          </p:cNvSpPr>
+          <p:nvPr/>
+        </p:nvSpPr>
+        <p:spPr>
+          <a:xfrm xmlns:a="http://schemas.openxmlformats.org/drawingml/2006/main">
+            <a:off x="1162050" y="2905125"/>
+            <a:ext cx="400050" cy="400050"/>
           </a:xfrm>
           <a:prstGeom xmlns:a="http://schemas.openxmlformats.org/drawingml/2006/main" prst="rect">
             <a:avLst/>
@@ -8470,9 +8474,9 @@
           <a:lstStyle xmlns:a="http://schemas.openxmlformats.org/drawingml/2006/main"/>
           <a:p xmlns:a="http://schemas.openxmlformats.org/drawingml/2006/main">
             <a:pPr algn="ctr">
-              <a:defRPr sz="1350" b="1">
-                <a:solidFill>
-                  <a:srgbClr val="FFFFFF"/>
+              <a:defRPr sz="1125" b="1">
+                <a:solidFill>
+                  <a:srgbClr val="2C6E73"/>
                 </a:solidFill>
                 <a:latin typeface="Arial"/>
                 <a:ea typeface="Arial"/>
@@ -8480,9 +8484,9 @@
               </a:defRPr>
             </a:pPr>
             <a:r>
-              <a:rPr sz="1350" b="1">
-                <a:solidFill>
-                  <a:srgbClr val="FFFFFF"/>
+              <a:rPr sz="1125" b="1">
+                <a:solidFill>
+                  <a:srgbClr val="2C6E73"/>
                 </a:solidFill>
                 <a:latin typeface="Arial"/>
                 <a:ea typeface="Arial"/>
@@ -8498,19 +8502,19 @@
           <p:cNvPr id="16" name="">
             <a:extLst xmlns:a="http://schemas.openxmlformats.org/drawingml/2006/main">
               <a:ext uri="{FF2B5EF4-FFF2-40B4-BE49-F238E27FC236}">
-                <a16:creationId xmlns:a16="http://schemas.microsoft.com/office/drawing/2014/main" id="{927C0B19-62A8-47F6-9C28-1B4E77857F1A}"/>
-              </a:ext>
-            </a:extLst>
-          </p:cNvPr>
-          <p:cNvSpPr>
-            <a:spLocks xmlns:a="http://schemas.openxmlformats.org/drawingml/2006/main" noGrp="1"/>
-          </p:cNvSpPr>
-          <p:nvPr/>
-        </p:nvSpPr>
-        <p:spPr>
-          <a:xfrm xmlns:a="http://schemas.openxmlformats.org/drawingml/2006/main">
-            <a:off x="1714500" y="2924175"/>
-            <a:ext cx="9429750" cy="609600"/>
+                <a16:creationId xmlns:a16="http://schemas.microsoft.com/office/drawing/2014/main" id="{A1E8F1B3-DB25-45BB-B9E1-055A2FF6E3B6}"/>
+              </a:ext>
+            </a:extLst>
+          </p:cNvPr>
+          <p:cNvSpPr>
+            <a:spLocks xmlns:a="http://schemas.openxmlformats.org/drawingml/2006/main" noGrp="1"/>
+          </p:cNvSpPr>
+          <p:nvPr/>
+        </p:nvSpPr>
+        <p:spPr>
+          <a:xfrm xmlns:a="http://schemas.openxmlformats.org/drawingml/2006/main">
+            <a:off x="1714500" y="2819400"/>
+            <a:ext cx="9525000" cy="638175"/>
           </a:xfrm>
           <a:prstGeom xmlns:a="http://schemas.openxmlformats.org/drawingml/2006/main" prst="rect">
             <a:avLst/>
@@ -8527,7 +8531,7 @@
           <a:lstStyle xmlns:a="http://schemas.openxmlformats.org/drawingml/2006/main"/>
           <a:p xmlns:a="http://schemas.openxmlformats.org/drawingml/2006/main">
             <a:pPr algn="l">
-              <a:defRPr sz="1500" b="0">
+              <a:defRPr sz="1575" b="0">
                 <a:solidFill>
                   <a:srgbClr val="17253A"/>
                 </a:solidFill>
@@ -8537,7 +8541,7 @@
               </a:defRPr>
             </a:pPr>
             <a:r>
-              <a:rPr sz="1500" b="0">
+              <a:rPr sz="1575" b="0">
                 <a:solidFill>
                   <a:srgbClr val="17253A"/>
                 </a:solidFill>
@@ -8545,7 +8549,7 @@
                 <a:ea typeface="Arial"/>
                 <a:cs typeface="Arial"/>
               </a:rPr>
-              <a:t>Set up the method: Plan the operations in order before calculating.</a:t>
+              <a:t>48 × 125 represents all books received</a:t>
             </a:r>
           </a:p>
         </p:txBody>
@@ -8555,28 +8559,30 @@
           <p:cNvPr id="17" name="">
             <a:extLst xmlns:a="http://schemas.openxmlformats.org/drawingml/2006/main">
               <a:ext uri="{FF2B5EF4-FFF2-40B4-BE49-F238E27FC236}">
-                <a16:creationId xmlns:a16="http://schemas.microsoft.com/office/drawing/2014/main" id="{BF32DDCA-E016-4E6E-BAA6-8EB75734C7FB}"/>
-              </a:ext>
-            </a:extLst>
-          </p:cNvPr>
-          <p:cNvSpPr>
-            <a:spLocks xmlns:a="http://schemas.openxmlformats.org/drawingml/2006/main" noGrp="1"/>
-          </p:cNvSpPr>
-          <p:nvPr/>
-        </p:nvSpPr>
-        <p:spPr>
-          <a:xfrm xmlns:a="http://schemas.openxmlformats.org/drawingml/2006/main">
-            <a:off x="1000125" y="3733800"/>
-            <a:ext cx="476250" cy="476250"/>
-          </a:xfrm>
-          <a:prstGeom xmlns:a="http://schemas.openxmlformats.org/drawingml/2006/main" prst="ellipse">
+                <a16:creationId xmlns:a16="http://schemas.microsoft.com/office/drawing/2014/main" id="{B5E315CC-7CE8-4ECC-BBD7-898B60337427}"/>
+              </a:ext>
+            </a:extLst>
+          </p:cNvPr>
+          <p:cNvSpPr>
+            <a:spLocks xmlns:a="http://schemas.openxmlformats.org/drawingml/2006/main" noGrp="1"/>
+          </p:cNvSpPr>
+          <p:nvPr/>
+        </p:nvSpPr>
+        <p:spPr>
+          <a:xfrm xmlns:a="http://schemas.openxmlformats.org/drawingml/2006/main">
+            <a:off x="1714500" y="3476625"/>
+            <a:ext cx="9334500" cy="9525"/>
+          </a:xfrm>
+          <a:prstGeom xmlns:a="http://schemas.openxmlformats.org/drawingml/2006/main" prst="rect">
             <a:avLst/>
           </a:prstGeom>
           <a:solidFill xmlns:a="http://schemas.openxmlformats.org/drawingml/2006/main">
-            <a:srgbClr val="2C6E73"/>
+            <a:srgbClr val="D9E0E6"/>
           </a:solidFill>
           <a:ln xmlns:a="http://schemas.openxmlformats.org/drawingml/2006/main" w="0">
-            <a:noFill/>
+            <a:solidFill>
+              <a:srgbClr val="D9E0E6"/>
+            </a:solidFill>
           </a:ln>
         </p:spPr>
       </p:sp>
@@ -8585,19 +8591,19 @@
           <p:cNvPr id="18" name="">
             <a:extLst xmlns:a="http://schemas.openxmlformats.org/drawingml/2006/main">
               <a:ext uri="{FF2B5EF4-FFF2-40B4-BE49-F238E27FC236}">
-                <a16:creationId xmlns:a16="http://schemas.microsoft.com/office/drawing/2014/main" id="{B9EA0057-168E-4CA0-8F12-26B940545463}"/>
-              </a:ext>
-            </a:extLst>
-          </p:cNvPr>
-          <p:cNvSpPr>
-            <a:spLocks xmlns:a="http://schemas.openxmlformats.org/drawingml/2006/main" noGrp="1"/>
-          </p:cNvSpPr>
-          <p:nvPr/>
-        </p:nvSpPr>
-        <p:spPr>
-          <a:xfrm xmlns:a="http://schemas.openxmlformats.org/drawingml/2006/main">
-            <a:off x="1000125" y="3762375"/>
-            <a:ext cx="476250" cy="419100"/>
+                <a16:creationId xmlns:a16="http://schemas.microsoft.com/office/drawing/2014/main" id="{C1ACFE47-D177-40B9-8F82-EA194670F14E}"/>
+              </a:ext>
+            </a:extLst>
+          </p:cNvPr>
+          <p:cNvSpPr>
+            <a:spLocks xmlns:a="http://schemas.openxmlformats.org/drawingml/2006/main" noGrp="1"/>
+          </p:cNvSpPr>
+          <p:nvPr/>
+        </p:nvSpPr>
+        <p:spPr>
+          <a:xfrm xmlns:a="http://schemas.openxmlformats.org/drawingml/2006/main">
+            <a:off x="1162050" y="3609975"/>
+            <a:ext cx="400050" cy="400050"/>
           </a:xfrm>
           <a:prstGeom xmlns:a="http://schemas.openxmlformats.org/drawingml/2006/main" prst="rect">
             <a:avLst/>
@@ -8614,9 +8620,9 @@
           <a:lstStyle xmlns:a="http://schemas.openxmlformats.org/drawingml/2006/main"/>
           <a:p xmlns:a="http://schemas.openxmlformats.org/drawingml/2006/main">
             <a:pPr algn="ctr">
-              <a:defRPr sz="1350" b="1">
-                <a:solidFill>
-                  <a:srgbClr val="FFFFFF"/>
+              <a:defRPr sz="1125" b="1">
+                <a:solidFill>
+                  <a:srgbClr val="2C6E73"/>
                 </a:solidFill>
                 <a:latin typeface="Arial"/>
                 <a:ea typeface="Arial"/>
@@ -8624,9 +8630,9 @@
               </a:defRPr>
             </a:pPr>
             <a:r>
-              <a:rPr sz="1350" b="1">
-                <a:solidFill>
-                  <a:srgbClr val="FFFFFF"/>
+              <a:rPr sz="1125" b="1">
+                <a:solidFill>
+                  <a:srgbClr val="2C6E73"/>
                 </a:solidFill>
                 <a:latin typeface="Arial"/>
                 <a:ea typeface="Arial"/>
@@ -8642,19 +8648,19 @@
           <p:cNvPr id="19" name="">
             <a:extLst xmlns:a="http://schemas.openxmlformats.org/drawingml/2006/main">
               <a:ext uri="{FF2B5EF4-FFF2-40B4-BE49-F238E27FC236}">
-                <a16:creationId xmlns:a16="http://schemas.microsoft.com/office/drawing/2014/main" id="{1C2E316F-9196-4E21-8B3F-E16A33004E6B}"/>
-              </a:ext>
-            </a:extLst>
-          </p:cNvPr>
-          <p:cNvSpPr>
-            <a:spLocks xmlns:a="http://schemas.openxmlformats.org/drawingml/2006/main" noGrp="1"/>
-          </p:cNvSpPr>
-          <p:nvPr/>
-        </p:nvSpPr>
-        <p:spPr>
-          <a:xfrm xmlns:a="http://schemas.openxmlformats.org/drawingml/2006/main">
-            <a:off x="1714500" y="3667125"/>
-            <a:ext cx="9429750" cy="609600"/>
+                <a16:creationId xmlns:a16="http://schemas.microsoft.com/office/drawing/2014/main" id="{2F604E70-874B-4271-970C-3A71CD6D29C1}"/>
+              </a:ext>
+            </a:extLst>
+          </p:cNvPr>
+          <p:cNvSpPr>
+            <a:spLocks xmlns:a="http://schemas.openxmlformats.org/drawingml/2006/main" noGrp="1"/>
+          </p:cNvSpPr>
+          <p:nvPr/>
+        </p:nvSpPr>
+        <p:spPr>
+          <a:xfrm xmlns:a="http://schemas.openxmlformats.org/drawingml/2006/main">
+            <a:off x="1714500" y="3524250"/>
+            <a:ext cx="9525000" cy="638175"/>
           </a:xfrm>
           <a:prstGeom xmlns:a="http://schemas.openxmlformats.org/drawingml/2006/main" prst="rect">
             <a:avLst/>
@@ -8671,7 +8677,7 @@
           <a:lstStyle xmlns:a="http://schemas.openxmlformats.org/drawingml/2006/main"/>
           <a:p xmlns:a="http://schemas.openxmlformats.org/drawingml/2006/main">
             <a:pPr algn="l">
-              <a:defRPr sz="1500" b="0">
+              <a:defRPr sz="1575" b="0">
                 <a:solidFill>
                   <a:srgbClr val="17253A"/>
                 </a:solidFill>
@@ -8681,7 +8687,7 @@
               </a:defRPr>
             </a:pPr>
             <a:r>
-              <a:rPr sz="1500" b="0">
+              <a:rPr sz="1575" b="0">
                 <a:solidFill>
                   <a:srgbClr val="17253A"/>
                 </a:solidFill>
@@ -8689,7 +8695,7 @@
                 <a:ea typeface="Arial"/>
                 <a:cs typeface="Arial"/>
               </a:rPr>
-              <a:t>Complete the calculation: Multiplication must represent the total books first, so multiply first. The answer is 2,240.</a:t>
+              <a:t>48 × 125 = 6,000</a:t>
             </a:r>
           </a:p>
         </p:txBody>
@@ -8699,28 +8705,30 @@
           <p:cNvPr id="20" name="">
             <a:extLst xmlns:a="http://schemas.openxmlformats.org/drawingml/2006/main">
               <a:ext uri="{FF2B5EF4-FFF2-40B4-BE49-F238E27FC236}">
-                <a16:creationId xmlns:a16="http://schemas.microsoft.com/office/drawing/2014/main" id="{AEB1A80F-254F-41B2-A839-F9475E8EB74F}"/>
-              </a:ext>
-            </a:extLst>
-          </p:cNvPr>
-          <p:cNvSpPr>
-            <a:spLocks xmlns:a="http://schemas.openxmlformats.org/drawingml/2006/main" noGrp="1"/>
-          </p:cNvSpPr>
-          <p:nvPr/>
-        </p:nvSpPr>
-        <p:spPr>
-          <a:xfrm xmlns:a="http://schemas.openxmlformats.org/drawingml/2006/main">
-            <a:off x="1000125" y="4476750"/>
-            <a:ext cx="476250" cy="476250"/>
-          </a:xfrm>
-          <a:prstGeom xmlns:a="http://schemas.openxmlformats.org/drawingml/2006/main" prst="ellipse">
+                <a16:creationId xmlns:a16="http://schemas.microsoft.com/office/drawing/2014/main" id="{48E525CA-3674-40E9-A95B-8A3BDDA49997}"/>
+              </a:ext>
+            </a:extLst>
+          </p:cNvPr>
+          <p:cNvSpPr>
+            <a:spLocks xmlns:a="http://schemas.openxmlformats.org/drawingml/2006/main" noGrp="1"/>
+          </p:cNvSpPr>
+          <p:nvPr/>
+        </p:nvSpPr>
+        <p:spPr>
+          <a:xfrm xmlns:a="http://schemas.openxmlformats.org/drawingml/2006/main">
+            <a:off x="1714500" y="4181475"/>
+            <a:ext cx="9334500" cy="9525"/>
+          </a:xfrm>
+          <a:prstGeom xmlns:a="http://schemas.openxmlformats.org/drawingml/2006/main" prst="rect">
             <a:avLst/>
           </a:prstGeom>
           <a:solidFill xmlns:a="http://schemas.openxmlformats.org/drawingml/2006/main">
-            <a:srgbClr val="2C6E73"/>
+            <a:srgbClr val="D9E0E6"/>
           </a:solidFill>
           <a:ln xmlns:a="http://schemas.openxmlformats.org/drawingml/2006/main" w="0">
-            <a:noFill/>
+            <a:solidFill>
+              <a:srgbClr val="D9E0E6"/>
+            </a:solidFill>
           </a:ln>
         </p:spPr>
       </p:sp>
@@ -8729,19 +8737,19 @@
           <p:cNvPr id="21" name="">
             <a:extLst xmlns:a="http://schemas.openxmlformats.org/drawingml/2006/main">
               <a:ext uri="{FF2B5EF4-FFF2-40B4-BE49-F238E27FC236}">
-                <a16:creationId xmlns:a16="http://schemas.microsoft.com/office/drawing/2014/main" id="{7BA502FF-B815-4EE5-820F-E8D4F3CAF831}"/>
-              </a:ext>
-            </a:extLst>
-          </p:cNvPr>
-          <p:cNvSpPr>
-            <a:spLocks xmlns:a="http://schemas.openxmlformats.org/drawingml/2006/main" noGrp="1"/>
-          </p:cNvSpPr>
-          <p:nvPr/>
-        </p:nvSpPr>
-        <p:spPr>
-          <a:xfrm xmlns:a="http://schemas.openxmlformats.org/drawingml/2006/main">
-            <a:off x="1000125" y="4505325"/>
-            <a:ext cx="476250" cy="419100"/>
+                <a16:creationId xmlns:a16="http://schemas.microsoft.com/office/drawing/2014/main" id="{72518550-0FCE-4D2D-BA54-75816400E699}"/>
+              </a:ext>
+            </a:extLst>
+          </p:cNvPr>
+          <p:cNvSpPr>
+            <a:spLocks xmlns:a="http://schemas.openxmlformats.org/drawingml/2006/main" noGrp="1"/>
+          </p:cNvSpPr>
+          <p:nvPr/>
+        </p:nvSpPr>
+        <p:spPr>
+          <a:xfrm xmlns:a="http://schemas.openxmlformats.org/drawingml/2006/main">
+            <a:off x="1162050" y="4314825"/>
+            <a:ext cx="400050" cy="400050"/>
           </a:xfrm>
           <a:prstGeom xmlns:a="http://schemas.openxmlformats.org/drawingml/2006/main" prst="rect">
             <a:avLst/>
@@ -8758,9 +8766,9 @@
           <a:lstStyle xmlns:a="http://schemas.openxmlformats.org/drawingml/2006/main"/>
           <a:p xmlns:a="http://schemas.openxmlformats.org/drawingml/2006/main">
             <a:pPr algn="ctr">
-              <a:defRPr sz="1350" b="1">
-                <a:solidFill>
-                  <a:srgbClr val="FFFFFF"/>
+              <a:defRPr sz="1125" b="1">
+                <a:solidFill>
+                  <a:srgbClr val="2C6E73"/>
                 </a:solidFill>
                 <a:latin typeface="Arial"/>
                 <a:ea typeface="Arial"/>
@@ -8768,9 +8776,9 @@
               </a:defRPr>
             </a:pPr>
             <a:r>
-              <a:rPr sz="1350" b="1">
-                <a:solidFill>
-                  <a:srgbClr val="FFFFFF"/>
+              <a:rPr sz="1125" b="1">
+                <a:solidFill>
+                  <a:srgbClr val="2C6E73"/>
                 </a:solidFill>
                 <a:latin typeface="Arial"/>
                 <a:ea typeface="Arial"/>
@@ -8786,19 +8794,19 @@
           <p:cNvPr id="22" name="">
             <a:extLst xmlns:a="http://schemas.openxmlformats.org/drawingml/2006/main">
               <a:ext uri="{FF2B5EF4-FFF2-40B4-BE49-F238E27FC236}">
-                <a16:creationId xmlns:a16="http://schemas.microsoft.com/office/drawing/2014/main" id="{AED8889D-664D-44A5-BBB7-0507C772A264}"/>
-              </a:ext>
-            </a:extLst>
-          </p:cNvPr>
-          <p:cNvSpPr>
-            <a:spLocks xmlns:a="http://schemas.openxmlformats.org/drawingml/2006/main" noGrp="1"/>
-          </p:cNvSpPr>
-          <p:nvPr/>
-        </p:nvSpPr>
-        <p:spPr>
-          <a:xfrm xmlns:a="http://schemas.openxmlformats.org/drawingml/2006/main">
-            <a:off x="1714500" y="4410075"/>
-            <a:ext cx="9429750" cy="609600"/>
+                <a16:creationId xmlns:a16="http://schemas.microsoft.com/office/drawing/2014/main" id="{1C1EEC34-0B03-497B-84D8-E7F9FDB20815}"/>
+              </a:ext>
+            </a:extLst>
+          </p:cNvPr>
+          <p:cNvSpPr>
+            <a:spLocks xmlns:a="http://schemas.openxmlformats.org/drawingml/2006/main" noGrp="1"/>
+          </p:cNvSpPr>
+          <p:nvPr/>
+        </p:nvSpPr>
+        <p:spPr>
+          <a:xfrm xmlns:a="http://schemas.openxmlformats.org/drawingml/2006/main">
+            <a:off x="1714500" y="4229100"/>
+            <a:ext cx="9525000" cy="638175"/>
           </a:xfrm>
           <a:prstGeom xmlns:a="http://schemas.openxmlformats.org/drawingml/2006/main" prst="rect">
             <a:avLst/>
@@ -8815,9 +8823,9 @@
           <a:lstStyle xmlns:a="http://schemas.openxmlformats.org/drawingml/2006/main"/>
           <a:p xmlns:a="http://schemas.openxmlformats.org/drawingml/2006/main">
             <a:pPr algn="l">
-              <a:defRPr sz="1500" b="1">
-                <a:solidFill>
-                  <a:srgbClr val="2F785D"/>
+              <a:defRPr sz="1575" b="0">
+                <a:solidFill>
+                  <a:srgbClr val="17253A"/>
                 </a:solidFill>
                 <a:latin typeface="Arial"/>
                 <a:ea typeface="Arial"/>
@@ -8825,15 +8833,161 @@
               </a:defRPr>
             </a:pPr>
             <a:r>
-              <a:rPr sz="1500" b="1">
+              <a:rPr sz="1575" b="0">
+                <a:solidFill>
+                  <a:srgbClr val="17253A"/>
+                </a:solidFill>
+                <a:latin typeface="Arial"/>
+                <a:ea typeface="Arial"/>
+                <a:cs typeface="Arial"/>
+              </a:rPr>
+              <a:t>6,000 - 3,760</a:t>
+            </a:r>
+          </a:p>
+        </p:txBody>
+      </p:sp>
+      <p:sp>
+        <p:nvSpPr>
+          <p:cNvPr id="23" name="">
+            <a:extLst xmlns:a="http://schemas.openxmlformats.org/drawingml/2006/main">
+              <a:ext uri="{FF2B5EF4-FFF2-40B4-BE49-F238E27FC236}">
+                <a16:creationId xmlns:a16="http://schemas.microsoft.com/office/drawing/2014/main" id="{09287B89-6970-45CF-A82F-F644286417CA}"/>
+              </a:ext>
+            </a:extLst>
+          </p:cNvPr>
+          <p:cNvSpPr>
+            <a:spLocks xmlns:a="http://schemas.openxmlformats.org/drawingml/2006/main" noGrp="1"/>
+          </p:cNvSpPr>
+          <p:nvPr/>
+        </p:nvSpPr>
+        <p:spPr>
+          <a:xfrm xmlns:a="http://schemas.openxmlformats.org/drawingml/2006/main">
+            <a:off x="1714500" y="4886325"/>
+            <a:ext cx="9334500" cy="9525"/>
+          </a:xfrm>
+          <a:prstGeom xmlns:a="http://schemas.openxmlformats.org/drawingml/2006/main" prst="rect">
+            <a:avLst/>
+          </a:prstGeom>
+          <a:solidFill xmlns:a="http://schemas.openxmlformats.org/drawingml/2006/main">
+            <a:srgbClr val="D9E0E6"/>
+          </a:solidFill>
+          <a:ln xmlns:a="http://schemas.openxmlformats.org/drawingml/2006/main" w="0">
+            <a:solidFill>
+              <a:srgbClr val="D9E0E6"/>
+            </a:solidFill>
+          </a:ln>
+        </p:spPr>
+      </p:sp>
+      <p:sp>
+        <p:nvSpPr>
+          <p:cNvPr id="24" name="">
+            <a:extLst xmlns:a="http://schemas.openxmlformats.org/drawingml/2006/main">
+              <a:ext uri="{FF2B5EF4-FFF2-40B4-BE49-F238E27FC236}">
+                <a16:creationId xmlns:a16="http://schemas.microsoft.com/office/drawing/2014/main" id="{811E47C0-2228-41AB-9166-0251C84D3C31}"/>
+              </a:ext>
+            </a:extLst>
+          </p:cNvPr>
+          <p:cNvSpPr>
+            <a:spLocks xmlns:a="http://schemas.openxmlformats.org/drawingml/2006/main" noGrp="1"/>
+          </p:cNvSpPr>
+          <p:nvPr/>
+        </p:nvSpPr>
+        <p:spPr>
+          <a:xfrm xmlns:a="http://schemas.openxmlformats.org/drawingml/2006/main">
+            <a:off x="1162050" y="5019675"/>
+            <a:ext cx="400050" cy="400050"/>
+          </a:xfrm>
+          <a:prstGeom xmlns:a="http://schemas.openxmlformats.org/drawingml/2006/main" prst="rect">
+            <a:avLst/>
+          </a:prstGeom>
+          <a:noFill xmlns:a="http://schemas.openxmlformats.org/drawingml/2006/main"/>
+          <a:ln xmlns:a="http://schemas.openxmlformats.org/drawingml/2006/main" w="0">
+            <a:noFill/>
+          </a:ln>
+        </p:spPr>
+        <p:txBody>
+          <a:bodyPr xmlns:a="http://schemas.openxmlformats.org/drawingml/2006/main" anchor="ctr">
+            <a:normAutofit fontScale="100000"/>
+          </a:bodyPr>
+          <a:lstStyle xmlns:a="http://schemas.openxmlformats.org/drawingml/2006/main"/>
+          <a:p xmlns:a="http://schemas.openxmlformats.org/drawingml/2006/main">
+            <a:pPr algn="ctr">
+              <a:defRPr sz="1125" b="1">
                 <a:solidFill>
                   <a:srgbClr val="2F785D"/>
                 </a:solidFill>
                 <a:latin typeface="Arial"/>
                 <a:ea typeface="Arial"/>
                 <a:cs typeface="Arial"/>
+              </a:defRPr>
+            </a:pPr>
+            <a:r>
+              <a:rPr sz="1125" b="1">
+                <a:solidFill>
+                  <a:srgbClr val="2F785D"/>
+                </a:solidFill>
+                <a:latin typeface="Arial"/>
+                <a:ea typeface="Arial"/>
+                <a:cs typeface="Arial"/>
               </a:rPr>
-              <a:t>Check the result: Complete each step, label sub-totals and check the final answer in context.</a:t>
+              <a:t>5</a:t>
+            </a:r>
+          </a:p>
+        </p:txBody>
+      </p:sp>
+      <p:sp>
+        <p:nvSpPr>
+          <p:cNvPr id="25" name="">
+            <a:extLst xmlns:a="http://schemas.openxmlformats.org/drawingml/2006/main">
+              <a:ext uri="{FF2B5EF4-FFF2-40B4-BE49-F238E27FC236}">
+                <a16:creationId xmlns:a16="http://schemas.microsoft.com/office/drawing/2014/main" id="{230B2C0B-42BA-445F-8320-F7A6378508AD}"/>
+              </a:ext>
+            </a:extLst>
+          </p:cNvPr>
+          <p:cNvSpPr>
+            <a:spLocks xmlns:a="http://schemas.openxmlformats.org/drawingml/2006/main" noGrp="1"/>
+          </p:cNvSpPr>
+          <p:nvPr/>
+        </p:nvSpPr>
+        <p:spPr>
+          <a:xfrm xmlns:a="http://schemas.openxmlformats.org/drawingml/2006/main">
+            <a:off x="1714500" y="4933950"/>
+            <a:ext cx="9525000" cy="638175"/>
+          </a:xfrm>
+          <a:prstGeom xmlns:a="http://schemas.openxmlformats.org/drawingml/2006/main" prst="rect">
+            <a:avLst/>
+          </a:prstGeom>
+          <a:noFill xmlns:a="http://schemas.openxmlformats.org/drawingml/2006/main"/>
+          <a:ln xmlns:a="http://schemas.openxmlformats.org/drawingml/2006/main" w="0">
+            <a:noFill/>
+          </a:ln>
+        </p:spPr>
+        <p:txBody>
+          <a:bodyPr xmlns:a="http://schemas.openxmlformats.org/drawingml/2006/main" anchor="ctr">
+            <a:normAutofit fontScale="100000"/>
+          </a:bodyPr>
+          <a:lstStyle xmlns:a="http://schemas.openxmlformats.org/drawingml/2006/main"/>
+          <a:p xmlns:a="http://schemas.openxmlformats.org/drawingml/2006/main">
+            <a:pPr algn="l">
+              <a:defRPr sz="1575" b="1">
+                <a:solidFill>
+                  <a:srgbClr val="2F785D"/>
+                </a:solidFill>
+                <a:latin typeface="Arial"/>
+                <a:ea typeface="Arial"/>
+                <a:cs typeface="Arial"/>
+              </a:defRPr>
+            </a:pPr>
+            <a:r>
+              <a:rPr sz="1575" b="1">
+                <a:solidFill>
+                  <a:srgbClr val="2F785D"/>
+                </a:solidFill>
+                <a:latin typeface="Arial"/>
+                <a:ea typeface="Arial"/>
+                <a:cs typeface="Arial"/>
+              </a:rPr>
+              <a:t>2,240 books remain</a:t>
             </a:r>
           </a:p>
         </p:txBody>
@@ -8841,7 +8995,7 @@
     </p:spTree>
     <p:extLst>
       <p:ext uri="{BB962C8B-B14F-4D97-AF65-F5344CB8AC3E}">
-        <p14:creationId xmlns:p14="http://schemas.microsoft.com/office/powerpoint/2010/main" val="1525760938"/>
+        <p14:creationId xmlns:p14="http://schemas.microsoft.com/office/powerpoint/2010/main" val="2001889086"/>
       </p:ext>
     </p:extLst>
   </p:cSld>
@@ -9078,6 +9232,51 @@
                       </p:childTnLst>
                     </p:cTn>
                   </p:par>
+                  <p:par>
+                    <p:cTn id="23" fill="hold">
+                      <p:stCondLst>
+                        <p:cond delay="indefinite"/>
+                      </p:stCondLst>
+                      <p:childTnLst>
+                        <p:par>
+                          <p:cTn id="24" fill="hold">
+                            <p:stCondLst>
+                              <p:cond delay="0"/>
+                            </p:stCondLst>
+                            <p:childTnLst>
+                              <p:par>
+                                <p:cTn id="25" presetID="1" presetClass="entr" presetSubtype="0" fill="hold" grpId="0" nodeType="clickEffect">
+                                  <p:stCondLst>
+                                    <p:cond delay="0"/>
+                                  </p:stCondLst>
+                                  <p:childTnLst>
+                                    <p:set>
+                                      <p:cBhvr>
+                                        <p:cTn id="26" dur="1" fill="hold">
+                                          <p:stCondLst>
+                                            <p:cond delay="0"/>
+                                          </p:stCondLst>
+                                        </p:cTn>
+                                        <p:tgtEl>
+                                          <p:spTgt spid="25"/>
+                                        </p:tgtEl>
+                                        <p:attrNameLst>
+                                          <p:attrName>style.visibility</p:attrName>
+                                        </p:attrNameLst>
+                                      </p:cBhvr>
+                                      <p:to>
+                                        <p:strVal val="visible"/>
+                                      </p:to>
+                                    </p:set>
+                                  </p:childTnLst>
+                                </p:cTn>
+                              </p:par>
+                            </p:childTnLst>
+                          </p:cTn>
+                        </p:par>
+                      </p:childTnLst>
+                    </p:cTn>
+                  </p:par>
                 </p:childTnLst>
               </p:cTn>
               <p:prevCondLst>
@@ -9105,6 +9304,7 @@
       <p:bldP spid="16" grpId="0"/>
       <p:bldP spid="19" grpId="0"/>
       <p:bldP spid="22" grpId="0"/>
+      <p:bldP spid="25" grpId="0"/>
     </p:bldLst>
   </p:timing>
 </p:sld>
@@ -9134,7 +9334,7 @@
           <p:cNvPr id="15" name="">
             <a:extLst xmlns:a="http://schemas.openxmlformats.org/drawingml/2006/main">
               <a:ext uri="{FF2B5EF4-FFF2-40B4-BE49-F238E27FC236}">
-                <a16:creationId xmlns:a16="http://schemas.microsoft.com/office/drawing/2014/main" id="{288C0EE3-BDEA-4A66-AC4D-DB3303D4673E}"/>
+                <a16:creationId xmlns:a16="http://schemas.microsoft.com/office/drawing/2014/main" id="{F46C3483-8754-40FF-B773-A0C898DFA05A}"/>
               </a:ext>
             </a:extLst>
           </p:cNvPr>
@@ -9166,7 +9366,7 @@
           <p:cNvPr id="2" name="">
             <a:extLst xmlns:a="http://schemas.openxmlformats.org/drawingml/2006/main">
               <a:ext uri="{FF2B5EF4-FFF2-40B4-BE49-F238E27FC236}">
-                <a16:creationId xmlns:a16="http://schemas.microsoft.com/office/drawing/2014/main" id="{6B1AE42A-24E6-498C-8DA5-6D763B9DF9B1}"/>
+                <a16:creationId xmlns:a16="http://schemas.microsoft.com/office/drawing/2014/main" id="{EDFEA688-6659-49EE-A7B9-77EBB64443CB}"/>
               </a:ext>
             </a:extLst>
           </p:cNvPr>
@@ -9223,7 +9423,7 @@
           <p:cNvPr id="3" name="">
             <a:extLst xmlns:a="http://schemas.openxmlformats.org/drawingml/2006/main">
               <a:ext uri="{FF2B5EF4-FFF2-40B4-BE49-F238E27FC236}">
-                <a16:creationId xmlns:a16="http://schemas.microsoft.com/office/drawing/2014/main" id="{551D98CE-0012-45AB-9E22-F3D8038D1FED}"/>
+                <a16:creationId xmlns:a16="http://schemas.microsoft.com/office/drawing/2014/main" id="{4B66CC83-360B-43A9-9587-9F02A4BDEBA5}"/>
               </a:ext>
             </a:extLst>
           </p:cNvPr>
@@ -9255,7 +9455,7 @@
           <p:cNvPr id="4" name="">
             <a:extLst xmlns:a="http://schemas.openxmlformats.org/drawingml/2006/main">
               <a:ext uri="{FF2B5EF4-FFF2-40B4-BE49-F238E27FC236}">
-                <a16:creationId xmlns:a16="http://schemas.microsoft.com/office/drawing/2014/main" id="{167E8C67-377B-4B5E-8E11-21DB2964177E}"/>
+                <a16:creationId xmlns:a16="http://schemas.microsoft.com/office/drawing/2014/main" id="{19E72E79-74C3-43C0-AC4E-0CE4421B251E}"/>
               </a:ext>
             </a:extLst>
           </p:cNvPr>
@@ -9312,7 +9512,7 @@
           <p:cNvPr id="5" name="">
             <a:extLst xmlns:a="http://schemas.openxmlformats.org/drawingml/2006/main">
               <a:ext uri="{FF2B5EF4-FFF2-40B4-BE49-F238E27FC236}">
-                <a16:creationId xmlns:a16="http://schemas.microsoft.com/office/drawing/2014/main" id="{AE6B2783-A5E3-45F9-8833-3A9409DEFC36}"/>
+                <a16:creationId xmlns:a16="http://schemas.microsoft.com/office/drawing/2014/main" id="{6114E590-265C-4BF6-9733-BF6D65ABB609}"/>
               </a:ext>
             </a:extLst>
           </p:cNvPr>
@@ -9369,7 +9569,7 @@
           <p:cNvPr id="6" name="">
             <a:extLst xmlns:a="http://schemas.openxmlformats.org/drawingml/2006/main">
               <a:ext uri="{FF2B5EF4-FFF2-40B4-BE49-F238E27FC236}">
-                <a16:creationId xmlns:a16="http://schemas.microsoft.com/office/drawing/2014/main" id="{CFACD450-EA2F-476D-9D21-3A6C2FEECBAC}"/>
+                <a16:creationId xmlns:a16="http://schemas.microsoft.com/office/drawing/2014/main" id="{7C6B9CAD-3243-451A-8797-E5437D52E1FD}"/>
               </a:ext>
             </a:extLst>
           </p:cNvPr>
@@ -9426,7 +9626,7 @@
           <p:cNvPr id="7" name="">
             <a:extLst xmlns:a="http://schemas.openxmlformats.org/drawingml/2006/main">
               <a:ext uri="{FF2B5EF4-FFF2-40B4-BE49-F238E27FC236}">
-                <a16:creationId xmlns:a16="http://schemas.microsoft.com/office/drawing/2014/main" id="{C84C6910-040F-45D7-AD1D-D8D07387D1C4}"/>
+                <a16:creationId xmlns:a16="http://schemas.microsoft.com/office/drawing/2014/main" id="{37D96062-6E37-48FA-9D33-3880522A020E}"/>
               </a:ext>
             </a:extLst>
           </p:cNvPr>
@@ -9458,7 +9658,7 @@
           <p:cNvPr id="8" name="">
             <a:extLst xmlns:a="http://schemas.openxmlformats.org/drawingml/2006/main">
               <a:ext uri="{FF2B5EF4-FFF2-40B4-BE49-F238E27FC236}">
-                <a16:creationId xmlns:a16="http://schemas.microsoft.com/office/drawing/2014/main" id="{2631BAE4-8442-42E0-99CF-EA95E7DB3D85}"/>
+                <a16:creationId xmlns:a16="http://schemas.microsoft.com/office/drawing/2014/main" id="{C24E204F-0C71-48DD-9B09-944E267D59B0}"/>
               </a:ext>
             </a:extLst>
           </p:cNvPr>
@@ -9515,7 +9715,7 @@
           <p:cNvPr id="9" name="">
             <a:extLst xmlns:a="http://schemas.openxmlformats.org/drawingml/2006/main">
               <a:ext uri="{FF2B5EF4-FFF2-40B4-BE49-F238E27FC236}">
-                <a16:creationId xmlns:a16="http://schemas.microsoft.com/office/drawing/2014/main" id="{3B37372A-EE47-414E-89D5-2027BD7ACC29}"/>
+                <a16:creationId xmlns:a16="http://schemas.microsoft.com/office/drawing/2014/main" id="{E895997A-F41C-4A66-8F1F-2FE9B31D4C60}"/>
               </a:ext>
             </a:extLst>
           </p:cNvPr>
@@ -9572,7 +9772,7 @@
           <p:cNvPr id="10" name="">
             <a:extLst xmlns:a="http://schemas.openxmlformats.org/drawingml/2006/main">
               <a:ext uri="{FF2B5EF4-FFF2-40B4-BE49-F238E27FC236}">
-                <a16:creationId xmlns:a16="http://schemas.microsoft.com/office/drawing/2014/main" id="{31283049-DC53-41A0-B163-B5A31DC02EF4}"/>
+                <a16:creationId xmlns:a16="http://schemas.microsoft.com/office/drawing/2014/main" id="{6153F861-AAA9-436F-8E43-7BF17D095CB8}"/>
               </a:ext>
             </a:extLst>
           </p:cNvPr>
@@ -9629,7 +9829,7 @@
           <p:cNvPr id="11" name="">
             <a:extLst xmlns:a="http://schemas.openxmlformats.org/drawingml/2006/main">
               <a:ext uri="{FF2B5EF4-FFF2-40B4-BE49-F238E27FC236}">
-                <a16:creationId xmlns:a16="http://schemas.microsoft.com/office/drawing/2014/main" id="{913DA7BC-8984-416A-9A50-306B5DFC23E4}"/>
+                <a16:creationId xmlns:a16="http://schemas.microsoft.com/office/drawing/2014/main" id="{2B2F7BFA-795C-40E2-84AD-D8D8F6CF3657}"/>
               </a:ext>
             </a:extLst>
           </p:cNvPr>
@@ -9686,7 +9886,7 @@
           <p:cNvPr id="12" name="">
             <a:extLst xmlns:a="http://schemas.openxmlformats.org/drawingml/2006/main">
               <a:ext uri="{FF2B5EF4-FFF2-40B4-BE49-F238E27FC236}">
-                <a16:creationId xmlns:a16="http://schemas.microsoft.com/office/drawing/2014/main" id="{FCCAD6F4-F162-492E-9504-84DC24C2DEE1}"/>
+                <a16:creationId xmlns:a16="http://schemas.microsoft.com/office/drawing/2014/main" id="{A6B9D1E8-8CDF-4EBE-94A3-E9C10A62F4D4}"/>
               </a:ext>
             </a:extLst>
           </p:cNvPr>
@@ -9718,7 +9918,7 @@
           <p:cNvPr id="13" name="">
             <a:extLst xmlns:a="http://schemas.openxmlformats.org/drawingml/2006/main">
               <a:ext uri="{FF2B5EF4-FFF2-40B4-BE49-F238E27FC236}">
-                <a16:creationId xmlns:a16="http://schemas.microsoft.com/office/drawing/2014/main" id="{839D0A08-378C-4E5E-B771-FDFB1A89BF81}"/>
+                <a16:creationId xmlns:a16="http://schemas.microsoft.com/office/drawing/2014/main" id="{463FCB0F-0D15-45A7-9E20-F7FBE2DC5D96}"/>
               </a:ext>
             </a:extLst>
           </p:cNvPr>
@@ -9775,7 +9975,7 @@
           <p:cNvPr id="14" name="">
             <a:extLst xmlns:a="http://schemas.openxmlformats.org/drawingml/2006/main">
               <a:ext uri="{FF2B5EF4-FFF2-40B4-BE49-F238E27FC236}">
-                <a16:creationId xmlns:a16="http://schemas.microsoft.com/office/drawing/2014/main" id="{D5B4FC9F-430E-4DC2-832C-6CBA0A883BCF}"/>
+                <a16:creationId xmlns:a16="http://schemas.microsoft.com/office/drawing/2014/main" id="{58442514-E23D-4AFC-B5DC-6CEF90C9B6AB}"/>
               </a:ext>
             </a:extLst>
           </p:cNvPr>
@@ -9830,7 +10030,7 @@
     </p:spTree>
     <p:extLst>
       <p:ext uri="{BB962C8B-B14F-4D97-AF65-F5344CB8AC3E}">
-        <p14:creationId xmlns:p14="http://schemas.microsoft.com/office/powerpoint/2010/main" val="1733000488"/>
+        <p14:creationId xmlns:p14="http://schemas.microsoft.com/office/powerpoint/2010/main" val="29686956"/>
       </p:ext>
     </p:extLst>
   </p:cSld>
@@ -10031,7 +10231,7 @@
           <p:cNvPr id="16" name="">
             <a:extLst xmlns:a="http://schemas.openxmlformats.org/drawingml/2006/main">
               <a:ext uri="{FF2B5EF4-FFF2-40B4-BE49-F238E27FC236}">
-                <a16:creationId xmlns:a16="http://schemas.microsoft.com/office/drawing/2014/main" id="{374E3986-68CE-475E-BA00-8E6EB8EBB2FA}"/>
+                <a16:creationId xmlns:a16="http://schemas.microsoft.com/office/drawing/2014/main" id="{309E2A1D-E87D-413A-8D5D-74B11EE475C6}"/>
               </a:ext>
             </a:extLst>
           </p:cNvPr>
@@ -10063,7 +10263,7 @@
           <p:cNvPr id="2" name="">
             <a:extLst xmlns:a="http://schemas.openxmlformats.org/drawingml/2006/main">
               <a:ext uri="{FF2B5EF4-FFF2-40B4-BE49-F238E27FC236}">
-                <a16:creationId xmlns:a16="http://schemas.microsoft.com/office/drawing/2014/main" id="{D2CD1C1B-F227-4053-BA22-0653A62B18A6}"/>
+                <a16:creationId xmlns:a16="http://schemas.microsoft.com/office/drawing/2014/main" id="{110BA342-2D43-4E08-B47E-9AE0DD09BD2B}"/>
               </a:ext>
             </a:extLst>
           </p:cNvPr>
@@ -10120,7 +10320,7 @@
           <p:cNvPr id="3" name="">
             <a:extLst xmlns:a="http://schemas.openxmlformats.org/drawingml/2006/main">
               <a:ext uri="{FF2B5EF4-FFF2-40B4-BE49-F238E27FC236}">
-                <a16:creationId xmlns:a16="http://schemas.microsoft.com/office/drawing/2014/main" id="{88487B78-6D36-4F5D-A3B4-D2FCB92FCF21}"/>
+                <a16:creationId xmlns:a16="http://schemas.microsoft.com/office/drawing/2014/main" id="{91CAAEEA-160F-4F8B-9E9E-7A9612EB3A06}"/>
               </a:ext>
             </a:extLst>
           </p:cNvPr>
@@ -10152,7 +10352,7 @@
           <p:cNvPr id="4" name="">
             <a:extLst xmlns:a="http://schemas.openxmlformats.org/drawingml/2006/main">
               <a:ext uri="{FF2B5EF4-FFF2-40B4-BE49-F238E27FC236}">
-                <a16:creationId xmlns:a16="http://schemas.microsoft.com/office/drawing/2014/main" id="{3F18603F-CFC7-45E9-AFF4-08AC695915A1}"/>
+                <a16:creationId xmlns:a16="http://schemas.microsoft.com/office/drawing/2014/main" id="{9F260738-FAA0-4990-B020-332DCD110B0A}"/>
               </a:ext>
             </a:extLst>
           </p:cNvPr>
@@ -10209,7 +10409,7 @@
           <p:cNvPr id="5" name="">
             <a:extLst xmlns:a="http://schemas.openxmlformats.org/drawingml/2006/main">
               <a:ext uri="{FF2B5EF4-FFF2-40B4-BE49-F238E27FC236}">
-                <a16:creationId xmlns:a16="http://schemas.microsoft.com/office/drawing/2014/main" id="{A6A7862F-D55B-4C0C-A7AA-6B75CF0E6AD9}"/>
+                <a16:creationId xmlns:a16="http://schemas.microsoft.com/office/drawing/2014/main" id="{70A158B1-BFE0-456A-B0C8-7E7F71D5056B}"/>
               </a:ext>
             </a:extLst>
           </p:cNvPr>
@@ -10266,7 +10466,7 @@
           <p:cNvPr id="6" name="">
             <a:extLst xmlns:a="http://schemas.openxmlformats.org/drawingml/2006/main">
               <a:ext uri="{FF2B5EF4-FFF2-40B4-BE49-F238E27FC236}">
-                <a16:creationId xmlns:a16="http://schemas.microsoft.com/office/drawing/2014/main" id="{72448D54-F03E-4188-A48E-A9E69ABC52BC}"/>
+                <a16:creationId xmlns:a16="http://schemas.microsoft.com/office/drawing/2014/main" id="{A7880A11-2802-4BE3-8844-3606F3432FA8}"/>
               </a:ext>
             </a:extLst>
           </p:cNvPr>
@@ -10323,7 +10523,7 @@
           <p:cNvPr id="7" name="">
             <a:extLst xmlns:a="http://schemas.openxmlformats.org/drawingml/2006/main">
               <a:ext uri="{FF2B5EF4-FFF2-40B4-BE49-F238E27FC236}">
-                <a16:creationId xmlns:a16="http://schemas.microsoft.com/office/drawing/2014/main" id="{A82CD1C0-7B2F-45A1-BA7F-64C2B502889C}"/>
+                <a16:creationId xmlns:a16="http://schemas.microsoft.com/office/drawing/2014/main" id="{655C97D1-3DD6-4BD8-AC21-B6FF3FBADDE4}"/>
               </a:ext>
             </a:extLst>
           </p:cNvPr>
@@ -10355,7 +10555,7 @@
           <p:cNvPr id="8" name="">
             <a:extLst xmlns:a="http://schemas.openxmlformats.org/drawingml/2006/main">
               <a:ext uri="{FF2B5EF4-FFF2-40B4-BE49-F238E27FC236}">
-                <a16:creationId xmlns:a16="http://schemas.microsoft.com/office/drawing/2014/main" id="{5AFF110E-FB41-4E75-9A40-34E8A11931F4}"/>
+                <a16:creationId xmlns:a16="http://schemas.microsoft.com/office/drawing/2014/main" id="{B229BE31-53A5-43A2-9AB2-81FC5A4ABE0F}"/>
               </a:ext>
             </a:extLst>
           </p:cNvPr>
@@ -10412,7 +10612,7 @@
           <p:cNvPr id="9" name="">
             <a:extLst xmlns:a="http://schemas.openxmlformats.org/drawingml/2006/main">
               <a:ext uri="{FF2B5EF4-FFF2-40B4-BE49-F238E27FC236}">
-                <a16:creationId xmlns:a16="http://schemas.microsoft.com/office/drawing/2014/main" id="{7D9D3E5D-4BAE-4286-93C8-D4E3F8EDB18B}"/>
+                <a16:creationId xmlns:a16="http://schemas.microsoft.com/office/drawing/2014/main" id="{83FA285C-3019-4976-A59C-2E04524938BA}"/>
               </a:ext>
             </a:extLst>
           </p:cNvPr>
@@ -10469,7 +10669,7 @@
           <p:cNvPr id="10" name="">
             <a:extLst xmlns:a="http://schemas.openxmlformats.org/drawingml/2006/main">
               <a:ext uri="{FF2B5EF4-FFF2-40B4-BE49-F238E27FC236}">
-                <a16:creationId xmlns:a16="http://schemas.microsoft.com/office/drawing/2014/main" id="{1593BE97-AD3C-496A-82C4-5B6C85526FFE}"/>
+                <a16:creationId xmlns:a16="http://schemas.microsoft.com/office/drawing/2014/main" id="{FB176F65-2214-4679-92A2-EA0B75D18727}"/>
               </a:ext>
             </a:extLst>
           </p:cNvPr>
@@ -10526,7 +10726,7 @@
           <p:cNvPr id="11" name="">
             <a:extLst xmlns:a="http://schemas.openxmlformats.org/drawingml/2006/main">
               <a:ext uri="{FF2B5EF4-FFF2-40B4-BE49-F238E27FC236}">
-                <a16:creationId xmlns:a16="http://schemas.microsoft.com/office/drawing/2014/main" id="{764E81E3-0126-46DC-BC24-E486D0DC2EA2}"/>
+                <a16:creationId xmlns:a16="http://schemas.microsoft.com/office/drawing/2014/main" id="{365BF239-0C7A-4BF5-9322-F9A9E5CA54A8}"/>
               </a:ext>
             </a:extLst>
           </p:cNvPr>
@@ -10583,7 +10783,7 @@
           <p:cNvPr id="12" name="">
             <a:extLst xmlns:a="http://schemas.openxmlformats.org/drawingml/2006/main">
               <a:ext uri="{FF2B5EF4-FFF2-40B4-BE49-F238E27FC236}">
-                <a16:creationId xmlns:a16="http://schemas.microsoft.com/office/drawing/2014/main" id="{1E74D887-A47A-414C-9F66-006740302BCA}"/>
+                <a16:creationId xmlns:a16="http://schemas.microsoft.com/office/drawing/2014/main" id="{71FEFE86-8591-4AFD-B6D7-A052F71322EE}"/>
               </a:ext>
             </a:extLst>
           </p:cNvPr>
@@ -10640,7 +10840,7 @@
           <p:cNvPr id="13" name="">
             <a:extLst xmlns:a="http://schemas.openxmlformats.org/drawingml/2006/main">
               <a:ext uri="{FF2B5EF4-FFF2-40B4-BE49-F238E27FC236}">
-                <a16:creationId xmlns:a16="http://schemas.microsoft.com/office/drawing/2014/main" id="{BB31E762-3D4F-4439-94F0-9C94E66AAEC3}"/>
+                <a16:creationId xmlns:a16="http://schemas.microsoft.com/office/drawing/2014/main" id="{2A0941F0-A55C-498C-96DB-E6FBB0344E3E}"/>
               </a:ext>
             </a:extLst>
           </p:cNvPr>
@@ -10697,7 +10897,7 @@
           <p:cNvPr id="14" name="">
             <a:extLst xmlns:a="http://schemas.openxmlformats.org/drawingml/2006/main">
               <a:ext uri="{FF2B5EF4-FFF2-40B4-BE49-F238E27FC236}">
-                <a16:creationId xmlns:a16="http://schemas.microsoft.com/office/drawing/2014/main" id="{3540DA58-693E-48A8-BF78-988C433529C9}"/>
+                <a16:creationId xmlns:a16="http://schemas.microsoft.com/office/drawing/2014/main" id="{437B4EE7-8690-4CB9-8610-164E60F9CB74}"/>
               </a:ext>
             </a:extLst>
           </p:cNvPr>
@@ -10754,7 +10954,7 @@
           <p:cNvPr id="15" name="">
             <a:extLst xmlns:a="http://schemas.openxmlformats.org/drawingml/2006/main">
               <a:ext uri="{FF2B5EF4-FFF2-40B4-BE49-F238E27FC236}">
-                <a16:creationId xmlns:a16="http://schemas.microsoft.com/office/drawing/2014/main" id="{3D8CA52F-4AAE-4237-A744-18BEFE586541}"/>
+                <a16:creationId xmlns:a16="http://schemas.microsoft.com/office/drawing/2014/main" id="{A7D6504E-A664-499C-870E-EEA0BE032FD0}"/>
               </a:ext>
             </a:extLst>
           </p:cNvPr>
@@ -10809,7 +11009,7 @@
     </p:spTree>
     <p:extLst>
       <p:ext uri="{BB962C8B-B14F-4D97-AF65-F5344CB8AC3E}">
-        <p14:creationId xmlns:p14="http://schemas.microsoft.com/office/powerpoint/2010/main" val="950298121"/>
+        <p14:creationId xmlns:p14="http://schemas.microsoft.com/office/powerpoint/2010/main" val="722893242"/>
       </p:ext>
     </p:extLst>
   </p:cSld>
@@ -10964,7 +11164,7 @@
           <p:cNvPr id="16" name="">
             <a:extLst xmlns:a="http://schemas.openxmlformats.org/drawingml/2006/main">
               <a:ext uri="{FF2B5EF4-FFF2-40B4-BE49-F238E27FC236}">
-                <a16:creationId xmlns:a16="http://schemas.microsoft.com/office/drawing/2014/main" id="{AA2C2631-F46B-4470-ABF3-D49A84E961F4}"/>
+                <a16:creationId xmlns:a16="http://schemas.microsoft.com/office/drawing/2014/main" id="{3FD4F960-D11D-47E2-9A60-CF25130FD1C5}"/>
               </a:ext>
             </a:extLst>
           </p:cNvPr>
@@ -10996,7 +11196,7 @@
           <p:cNvPr id="2" name="">
             <a:extLst xmlns:a="http://schemas.openxmlformats.org/drawingml/2006/main">
               <a:ext uri="{FF2B5EF4-FFF2-40B4-BE49-F238E27FC236}">
-                <a16:creationId xmlns:a16="http://schemas.microsoft.com/office/drawing/2014/main" id="{C3967409-4B5D-438E-AE27-38547F1D8EB3}"/>
+                <a16:creationId xmlns:a16="http://schemas.microsoft.com/office/drawing/2014/main" id="{8FDD0FBA-4181-4005-B24D-03C06E7D162A}"/>
               </a:ext>
             </a:extLst>
           </p:cNvPr>
@@ -11053,7 +11253,7 @@
           <p:cNvPr id="3" name="">
             <a:extLst xmlns:a="http://schemas.openxmlformats.org/drawingml/2006/main">
               <a:ext uri="{FF2B5EF4-FFF2-40B4-BE49-F238E27FC236}">
-                <a16:creationId xmlns:a16="http://schemas.microsoft.com/office/drawing/2014/main" id="{DCC19F2F-715E-46C8-A25E-64D3BB14F0A7}"/>
+                <a16:creationId xmlns:a16="http://schemas.microsoft.com/office/drawing/2014/main" id="{F8A574B0-A5B0-4E3F-B4A0-51E876D8FB9E}"/>
               </a:ext>
             </a:extLst>
           </p:cNvPr>
@@ -11085,7 +11285,7 @@
           <p:cNvPr id="4" name="">
             <a:extLst xmlns:a="http://schemas.openxmlformats.org/drawingml/2006/main">
               <a:ext uri="{FF2B5EF4-FFF2-40B4-BE49-F238E27FC236}">
-                <a16:creationId xmlns:a16="http://schemas.microsoft.com/office/drawing/2014/main" id="{67BEFE8E-7609-46D5-B054-4F5AFB313F01}"/>
+                <a16:creationId xmlns:a16="http://schemas.microsoft.com/office/drawing/2014/main" id="{F51F83EB-5972-4B72-822E-94316F251A72}"/>
               </a:ext>
             </a:extLst>
           </p:cNvPr>
@@ -11142,7 +11342,7 @@
           <p:cNvPr id="5" name="">
             <a:extLst xmlns:a="http://schemas.openxmlformats.org/drawingml/2006/main">
               <a:ext uri="{FF2B5EF4-FFF2-40B4-BE49-F238E27FC236}">
-                <a16:creationId xmlns:a16="http://schemas.microsoft.com/office/drawing/2014/main" id="{B8F5D4D9-E452-4F11-8C84-4C0A010FA65B}"/>
+                <a16:creationId xmlns:a16="http://schemas.microsoft.com/office/drawing/2014/main" id="{0C86C8F7-1479-488B-B49A-B0FF4D2516B5}"/>
               </a:ext>
             </a:extLst>
           </p:cNvPr>
@@ -11199,7 +11399,7 @@
           <p:cNvPr id="6" name="">
             <a:extLst xmlns:a="http://schemas.openxmlformats.org/drawingml/2006/main">
               <a:ext uri="{FF2B5EF4-FFF2-40B4-BE49-F238E27FC236}">
-                <a16:creationId xmlns:a16="http://schemas.microsoft.com/office/drawing/2014/main" id="{AC9C13C9-9737-4525-B753-299DA35899A5}"/>
+                <a16:creationId xmlns:a16="http://schemas.microsoft.com/office/drawing/2014/main" id="{B229B122-A199-45A7-8095-C460168C1FB7}"/>
               </a:ext>
             </a:extLst>
           </p:cNvPr>
@@ -11256,7 +11456,7 @@
           <p:cNvPr id="7" name="">
             <a:extLst xmlns:a="http://schemas.openxmlformats.org/drawingml/2006/main">
               <a:ext uri="{FF2B5EF4-FFF2-40B4-BE49-F238E27FC236}">
-                <a16:creationId xmlns:a16="http://schemas.microsoft.com/office/drawing/2014/main" id="{283FDED5-81DF-4F95-94BF-526D92CCEA2C}"/>
+                <a16:creationId xmlns:a16="http://schemas.microsoft.com/office/drawing/2014/main" id="{1606C8B9-6832-4F0B-B60D-808181E88EFF}"/>
               </a:ext>
             </a:extLst>
           </p:cNvPr>
@@ -11288,7 +11488,7 @@
           <p:cNvPr id="8" name="">
             <a:extLst xmlns:a="http://schemas.openxmlformats.org/drawingml/2006/main">
               <a:ext uri="{FF2B5EF4-FFF2-40B4-BE49-F238E27FC236}">
-                <a16:creationId xmlns:a16="http://schemas.microsoft.com/office/drawing/2014/main" id="{FE24B842-37F6-4E82-A269-231A93A06961}"/>
+                <a16:creationId xmlns:a16="http://schemas.microsoft.com/office/drawing/2014/main" id="{83021413-11AC-4459-ACC1-C5146BB1B2A6}"/>
               </a:ext>
             </a:extLst>
           </p:cNvPr>
@@ -11345,7 +11545,7 @@
           <p:cNvPr id="9" name="">
             <a:extLst xmlns:a="http://schemas.openxmlformats.org/drawingml/2006/main">
               <a:ext uri="{FF2B5EF4-FFF2-40B4-BE49-F238E27FC236}">
-                <a16:creationId xmlns:a16="http://schemas.microsoft.com/office/drawing/2014/main" id="{BCEAD8AB-F6F5-4AE6-BF15-E553C5E4BBEA}"/>
+                <a16:creationId xmlns:a16="http://schemas.microsoft.com/office/drawing/2014/main" id="{E48F3C03-D4C0-44EF-BD60-A93C1D4E36BB}"/>
               </a:ext>
             </a:extLst>
           </p:cNvPr>
@@ -11406,7 +11606,7 @@
           <p:nvPr/>
         </p:nvPicPr>
         <p:blipFill>
-          <a:blip xmlns:r="http://schemas.openxmlformats.org/officeDocument/2006/relationships" xmlns:a="http://schemas.openxmlformats.org/drawingml/2006/main" r:embed="Ra02bb85d70414869"/>
+          <a:blip xmlns:r="http://schemas.openxmlformats.org/officeDocument/2006/relationships" xmlns:a="http://schemas.openxmlformats.org/drawingml/2006/main" r:embed="R1229aa81af8b47f9"/>
           <a:stretch xmlns:a="http://schemas.openxmlformats.org/drawingml/2006/main"/>
         </p:blipFill>
         <p:spPr>
@@ -11424,7 +11624,7 @@
           <p:cNvPr id="11" name="">
             <a:extLst xmlns:a="http://schemas.openxmlformats.org/drawingml/2006/main">
               <a:ext uri="{FF2B5EF4-FFF2-40B4-BE49-F238E27FC236}">
-                <a16:creationId xmlns:a16="http://schemas.microsoft.com/office/drawing/2014/main" id="{27A7639C-A69F-42C6-AB44-279919F6A045}"/>
+                <a16:creationId xmlns:a16="http://schemas.microsoft.com/office/drawing/2014/main" id="{D476178B-1108-46EE-A6ED-2960DC2166D6}"/>
               </a:ext>
             </a:extLst>
           </p:cNvPr>
@@ -11481,7 +11681,7 @@
           <p:cNvPr id="12" name="">
             <a:extLst xmlns:a="http://schemas.openxmlformats.org/drawingml/2006/main">
               <a:ext uri="{FF2B5EF4-FFF2-40B4-BE49-F238E27FC236}">
-                <a16:creationId xmlns:a16="http://schemas.microsoft.com/office/drawing/2014/main" id="{AD81D27B-6AFF-41D0-865E-702124E37B07}"/>
+                <a16:creationId xmlns:a16="http://schemas.microsoft.com/office/drawing/2014/main" id="{F57EB38D-6938-4413-8728-9099CD4A3C95}"/>
               </a:ext>
             </a:extLst>
           </p:cNvPr>
@@ -11538,7 +11738,7 @@
           <p:cNvPr id="13" name="">
             <a:extLst xmlns:a="http://schemas.openxmlformats.org/drawingml/2006/main">
               <a:ext uri="{FF2B5EF4-FFF2-40B4-BE49-F238E27FC236}">
-                <a16:creationId xmlns:a16="http://schemas.microsoft.com/office/drawing/2014/main" id="{B34E2A5F-C97C-4D66-BDBC-6F5F3AC1FA1A}"/>
+                <a16:creationId xmlns:a16="http://schemas.microsoft.com/office/drawing/2014/main" id="{16245278-6539-4277-8FAD-43A57B90EC94}"/>
               </a:ext>
             </a:extLst>
           </p:cNvPr>
@@ -11570,7 +11770,7 @@
           <p:cNvPr id="14" name="">
             <a:extLst xmlns:a="http://schemas.openxmlformats.org/drawingml/2006/main">
               <a:ext uri="{FF2B5EF4-FFF2-40B4-BE49-F238E27FC236}">
-                <a16:creationId xmlns:a16="http://schemas.microsoft.com/office/drawing/2014/main" id="{D59545F6-3E9E-4DB8-92B9-F20819B24CE7}"/>
+                <a16:creationId xmlns:a16="http://schemas.microsoft.com/office/drawing/2014/main" id="{F5785DD8-DA96-4859-985E-D37E142829BE}"/>
               </a:ext>
             </a:extLst>
           </p:cNvPr>
@@ -11627,7 +11827,7 @@
           <p:cNvPr id="15" name="">
             <a:extLst xmlns:a="http://schemas.openxmlformats.org/drawingml/2006/main">
               <a:ext uri="{FF2B5EF4-FFF2-40B4-BE49-F238E27FC236}">
-                <a16:creationId xmlns:a16="http://schemas.microsoft.com/office/drawing/2014/main" id="{19EF99C0-57D3-44F1-BBBB-43888824114A}"/>
+                <a16:creationId xmlns:a16="http://schemas.microsoft.com/office/drawing/2014/main" id="{0E9AF1BD-4F68-4A25-A332-786C9BD554B5}"/>
               </a:ext>
             </a:extLst>
           </p:cNvPr>
@@ -11682,7 +11882,7 @@
     </p:spTree>
     <p:extLst>
       <p:ext uri="{BB962C8B-B14F-4D97-AF65-F5344CB8AC3E}">
-        <p14:creationId xmlns:p14="http://schemas.microsoft.com/office/powerpoint/2010/main" val="2025875021"/>
+        <p14:creationId xmlns:p14="http://schemas.microsoft.com/office/powerpoint/2010/main" val="1132285138"/>
       </p:ext>
     </p:extLst>
   </p:cSld>
@@ -11837,7 +12037,7 @@
           <p:cNvPr id="23" name="">
             <a:extLst xmlns:a="http://schemas.openxmlformats.org/drawingml/2006/main">
               <a:ext uri="{FF2B5EF4-FFF2-40B4-BE49-F238E27FC236}">
-                <a16:creationId xmlns:a16="http://schemas.microsoft.com/office/drawing/2014/main" id="{09EE2862-C4EC-4AB7-83E8-1B6BD7522941}"/>
+                <a16:creationId xmlns:a16="http://schemas.microsoft.com/office/drawing/2014/main" id="{8A152B14-72C8-45D6-9869-9BADC7ECE5D6}"/>
               </a:ext>
             </a:extLst>
           </p:cNvPr>
@@ -11869,7 +12069,7 @@
           <p:cNvPr id="2" name="">
             <a:extLst xmlns:a="http://schemas.openxmlformats.org/drawingml/2006/main">
               <a:ext uri="{FF2B5EF4-FFF2-40B4-BE49-F238E27FC236}">
-                <a16:creationId xmlns:a16="http://schemas.microsoft.com/office/drawing/2014/main" id="{11041224-6DF1-46B6-BDDB-F0608D5CDCF4}"/>
+                <a16:creationId xmlns:a16="http://schemas.microsoft.com/office/drawing/2014/main" id="{02413055-EAAE-4DD0-BE2F-98A55835AF88}"/>
               </a:ext>
             </a:extLst>
           </p:cNvPr>
@@ -11926,7 +12126,7 @@
           <p:cNvPr id="3" name="">
             <a:extLst xmlns:a="http://schemas.openxmlformats.org/drawingml/2006/main">
               <a:ext uri="{FF2B5EF4-FFF2-40B4-BE49-F238E27FC236}">
-                <a16:creationId xmlns:a16="http://schemas.microsoft.com/office/drawing/2014/main" id="{97260791-A48D-4A6D-8685-544AE39B77DD}"/>
+                <a16:creationId xmlns:a16="http://schemas.microsoft.com/office/drawing/2014/main" id="{06BD4F43-E3C0-47E0-A900-E020D93F3AA2}"/>
               </a:ext>
             </a:extLst>
           </p:cNvPr>
@@ -11958,7 +12158,7 @@
           <p:cNvPr id="4" name="">
             <a:extLst xmlns:a="http://schemas.openxmlformats.org/drawingml/2006/main">
               <a:ext uri="{FF2B5EF4-FFF2-40B4-BE49-F238E27FC236}">
-                <a16:creationId xmlns:a16="http://schemas.microsoft.com/office/drawing/2014/main" id="{833BA46C-6BB6-48E1-A4C9-B10E9C10B411}"/>
+                <a16:creationId xmlns:a16="http://schemas.microsoft.com/office/drawing/2014/main" id="{BCFEDD89-B606-42C8-AC4A-0953B4EBE1B8}"/>
               </a:ext>
             </a:extLst>
           </p:cNvPr>
@@ -12015,7 +12215,7 @@
           <p:cNvPr id="5" name="">
             <a:extLst xmlns:a="http://schemas.openxmlformats.org/drawingml/2006/main">
               <a:ext uri="{FF2B5EF4-FFF2-40B4-BE49-F238E27FC236}">
-                <a16:creationId xmlns:a16="http://schemas.microsoft.com/office/drawing/2014/main" id="{3413FA6A-D18B-4CD7-9797-F95B6DF0FBEA}"/>
+                <a16:creationId xmlns:a16="http://schemas.microsoft.com/office/drawing/2014/main" id="{1D9B3625-1F87-4EDD-BC93-FAC4104DC79A}"/>
               </a:ext>
             </a:extLst>
           </p:cNvPr>
@@ -12072,7 +12272,7 @@
           <p:cNvPr id="6" name="">
             <a:extLst xmlns:a="http://schemas.openxmlformats.org/drawingml/2006/main">
               <a:ext uri="{FF2B5EF4-FFF2-40B4-BE49-F238E27FC236}">
-                <a16:creationId xmlns:a16="http://schemas.microsoft.com/office/drawing/2014/main" id="{B3CF04B9-66F0-4442-BB24-4AC1D323E64D}"/>
+                <a16:creationId xmlns:a16="http://schemas.microsoft.com/office/drawing/2014/main" id="{4D932245-89C1-4953-9310-1791D8D920DA}"/>
               </a:ext>
             </a:extLst>
           </p:cNvPr>
@@ -12129,7 +12329,7 @@
           <p:cNvPr id="7" name="">
             <a:extLst xmlns:a="http://schemas.openxmlformats.org/drawingml/2006/main">
               <a:ext uri="{FF2B5EF4-FFF2-40B4-BE49-F238E27FC236}">
-                <a16:creationId xmlns:a16="http://schemas.microsoft.com/office/drawing/2014/main" id="{467811C9-5E55-45C0-8888-9C058D62EFEA}"/>
+                <a16:creationId xmlns:a16="http://schemas.microsoft.com/office/drawing/2014/main" id="{274DB635-3DB2-41B8-BB4E-908EDD173DD3}"/>
               </a:ext>
             </a:extLst>
           </p:cNvPr>
@@ -12161,7 +12361,7 @@
           <p:cNvPr id="8" name="">
             <a:extLst xmlns:a="http://schemas.openxmlformats.org/drawingml/2006/main">
               <a:ext uri="{FF2B5EF4-FFF2-40B4-BE49-F238E27FC236}">
-                <a16:creationId xmlns:a16="http://schemas.microsoft.com/office/drawing/2014/main" id="{077A82EE-59AE-463F-A655-F324206B6EEC}"/>
+                <a16:creationId xmlns:a16="http://schemas.microsoft.com/office/drawing/2014/main" id="{A9956236-F35C-4974-9657-7092CF867AAA}"/>
               </a:ext>
             </a:extLst>
           </p:cNvPr>
@@ -12218,7 +12418,7 @@
           <p:cNvPr id="9" name="">
             <a:extLst xmlns:a="http://schemas.openxmlformats.org/drawingml/2006/main">
               <a:ext uri="{FF2B5EF4-FFF2-40B4-BE49-F238E27FC236}">
-                <a16:creationId xmlns:a16="http://schemas.microsoft.com/office/drawing/2014/main" id="{743A5594-DD16-4163-8DBD-64C1E8C31C36}"/>
+                <a16:creationId xmlns:a16="http://schemas.microsoft.com/office/drawing/2014/main" id="{029E9015-3A4A-48E3-83FF-1E5CE3AFE236}"/>
               </a:ext>
             </a:extLst>
           </p:cNvPr>
@@ -12275,7 +12475,7 @@
           <p:cNvPr id="10" name="">
             <a:extLst xmlns:a="http://schemas.openxmlformats.org/drawingml/2006/main">
               <a:ext uri="{FF2B5EF4-FFF2-40B4-BE49-F238E27FC236}">
-                <a16:creationId xmlns:a16="http://schemas.microsoft.com/office/drawing/2014/main" id="{69E39FB7-DCA2-4517-B20A-7BD94947C73D}"/>
+                <a16:creationId xmlns:a16="http://schemas.microsoft.com/office/drawing/2014/main" id="{409FE3E4-C7FE-4407-8716-6F09628234C6}"/>
               </a:ext>
             </a:extLst>
           </p:cNvPr>
@@ -12309,7 +12509,7 @@
           <p:cNvPr id="11" name="">
             <a:extLst xmlns:a="http://schemas.openxmlformats.org/drawingml/2006/main">
               <a:ext uri="{FF2B5EF4-FFF2-40B4-BE49-F238E27FC236}">
-                <a16:creationId xmlns:a16="http://schemas.microsoft.com/office/drawing/2014/main" id="{3E1AF4E8-DFC5-4AC7-B14F-D2C07AC8BA7B}"/>
+                <a16:creationId xmlns:a16="http://schemas.microsoft.com/office/drawing/2014/main" id="{63EE3DC8-05EE-4B2E-9B62-279B41C8085B}"/>
               </a:ext>
             </a:extLst>
           </p:cNvPr>
@@ -12341,7 +12541,7 @@
           <p:cNvPr id="12" name="">
             <a:extLst xmlns:a="http://schemas.openxmlformats.org/drawingml/2006/main">
               <a:ext uri="{FF2B5EF4-FFF2-40B4-BE49-F238E27FC236}">
-                <a16:creationId xmlns:a16="http://schemas.microsoft.com/office/drawing/2014/main" id="{1B1FDC15-954E-4BF2-88B0-B3D6942FC203}"/>
+                <a16:creationId xmlns:a16="http://schemas.microsoft.com/office/drawing/2014/main" id="{C17A0661-47E2-4FFF-9130-67ACF6E62DBE}"/>
               </a:ext>
             </a:extLst>
           </p:cNvPr>
@@ -12398,7 +12598,7 @@
           <p:cNvPr id="13" name="">
             <a:extLst xmlns:a="http://schemas.openxmlformats.org/drawingml/2006/main">
               <a:ext uri="{FF2B5EF4-FFF2-40B4-BE49-F238E27FC236}">
-                <a16:creationId xmlns:a16="http://schemas.microsoft.com/office/drawing/2014/main" id="{CC8257AD-CE7E-4969-B34E-14B9BA58EA14}"/>
+                <a16:creationId xmlns:a16="http://schemas.microsoft.com/office/drawing/2014/main" id="{75D28D2D-ACD9-43DE-B6A2-273019DCAC08}"/>
               </a:ext>
             </a:extLst>
           </p:cNvPr>
@@ -12455,7 +12655,7 @@
           <p:cNvPr id="14" name="">
             <a:extLst xmlns:a="http://schemas.openxmlformats.org/drawingml/2006/main">
               <a:ext uri="{FF2B5EF4-FFF2-40B4-BE49-F238E27FC236}">
-                <a16:creationId xmlns:a16="http://schemas.microsoft.com/office/drawing/2014/main" id="{DE054F36-38C6-4348-994E-3901FCE2279C}"/>
+                <a16:creationId xmlns:a16="http://schemas.microsoft.com/office/drawing/2014/main" id="{432C5A13-26DB-46CA-BD1F-8C878D0A5F92}"/>
               </a:ext>
             </a:extLst>
           </p:cNvPr>
@@ -12489,7 +12689,7 @@
           <p:cNvPr id="15" name="">
             <a:extLst xmlns:a="http://schemas.openxmlformats.org/drawingml/2006/main">
               <a:ext uri="{FF2B5EF4-FFF2-40B4-BE49-F238E27FC236}">
-                <a16:creationId xmlns:a16="http://schemas.microsoft.com/office/drawing/2014/main" id="{7DC31278-FA93-497E-A154-4673847EDA02}"/>
+                <a16:creationId xmlns:a16="http://schemas.microsoft.com/office/drawing/2014/main" id="{7D8F4303-8E76-42C9-9248-B96926327304}"/>
               </a:ext>
             </a:extLst>
           </p:cNvPr>
@@ -12521,7 +12721,7 @@
           <p:cNvPr id="16" name="">
             <a:extLst xmlns:a="http://schemas.openxmlformats.org/drawingml/2006/main">
               <a:ext uri="{FF2B5EF4-FFF2-40B4-BE49-F238E27FC236}">
-                <a16:creationId xmlns:a16="http://schemas.microsoft.com/office/drawing/2014/main" id="{AE04727C-BAE2-47E6-A57A-DCBFDD924949}"/>
+                <a16:creationId xmlns:a16="http://schemas.microsoft.com/office/drawing/2014/main" id="{79FB1A2F-72B5-40D8-822A-0E04DD8D6AE6}"/>
               </a:ext>
             </a:extLst>
           </p:cNvPr>
@@ -12578,7 +12778,7 @@
           <p:cNvPr id="17" name="">
             <a:extLst xmlns:a="http://schemas.openxmlformats.org/drawingml/2006/main">
               <a:ext uri="{FF2B5EF4-FFF2-40B4-BE49-F238E27FC236}">
-                <a16:creationId xmlns:a16="http://schemas.microsoft.com/office/drawing/2014/main" id="{0EB07EEE-E174-43B5-8285-BC1BAEE579FD}"/>
+                <a16:creationId xmlns:a16="http://schemas.microsoft.com/office/drawing/2014/main" id="{CC65C9B8-1D0F-4FB6-B509-85824BC4F607}"/>
               </a:ext>
             </a:extLst>
           </p:cNvPr>
@@ -12635,7 +12835,7 @@
           <p:cNvPr id="18" name="">
             <a:extLst xmlns:a="http://schemas.openxmlformats.org/drawingml/2006/main">
               <a:ext uri="{FF2B5EF4-FFF2-40B4-BE49-F238E27FC236}">
-                <a16:creationId xmlns:a16="http://schemas.microsoft.com/office/drawing/2014/main" id="{55DFD6AC-6EFD-48F6-A49C-C8A1DA6CC53F}"/>
+                <a16:creationId xmlns:a16="http://schemas.microsoft.com/office/drawing/2014/main" id="{02E76F94-4848-458A-ABDE-3357EDC2E14F}"/>
               </a:ext>
             </a:extLst>
           </p:cNvPr>
@@ -12669,7 +12869,7 @@
           <p:cNvPr id="19" name="">
             <a:extLst xmlns:a="http://schemas.openxmlformats.org/drawingml/2006/main">
               <a:ext uri="{FF2B5EF4-FFF2-40B4-BE49-F238E27FC236}">
-                <a16:creationId xmlns:a16="http://schemas.microsoft.com/office/drawing/2014/main" id="{B5897D04-7AE5-4096-B9F2-B6C1BB4CCA7C}"/>
+                <a16:creationId xmlns:a16="http://schemas.microsoft.com/office/drawing/2014/main" id="{44282DA9-5ECA-4249-B2D8-A4F6FAF90AF5}"/>
               </a:ext>
             </a:extLst>
           </p:cNvPr>
@@ -12701,7 +12901,7 @@
           <p:cNvPr id="20" name="">
             <a:extLst xmlns:a="http://schemas.openxmlformats.org/drawingml/2006/main">
               <a:ext uri="{FF2B5EF4-FFF2-40B4-BE49-F238E27FC236}">
-                <a16:creationId xmlns:a16="http://schemas.microsoft.com/office/drawing/2014/main" id="{75C63BB1-3834-4055-9E6B-A25154EE2BB0}"/>
+                <a16:creationId xmlns:a16="http://schemas.microsoft.com/office/drawing/2014/main" id="{C8B87870-B6A9-4561-9883-0ED0969FEAC8}"/>
               </a:ext>
             </a:extLst>
           </p:cNvPr>
@@ -12758,7 +12958,7 @@
           <p:cNvPr id="21" name="">
             <a:extLst xmlns:a="http://schemas.openxmlformats.org/drawingml/2006/main">
               <a:ext uri="{FF2B5EF4-FFF2-40B4-BE49-F238E27FC236}">
-                <a16:creationId xmlns:a16="http://schemas.microsoft.com/office/drawing/2014/main" id="{8FB05AA5-2482-4AB9-911D-CA7A1D3FB2B4}"/>
+                <a16:creationId xmlns:a16="http://schemas.microsoft.com/office/drawing/2014/main" id="{A19071B7-B341-451B-BE3F-2C1848ACD0AA}"/>
               </a:ext>
             </a:extLst>
           </p:cNvPr>
@@ -12815,7 +13015,7 @@
           <p:cNvPr id="22" name="">
             <a:extLst xmlns:a="http://schemas.openxmlformats.org/drawingml/2006/main">
               <a:ext uri="{FF2B5EF4-FFF2-40B4-BE49-F238E27FC236}">
-                <a16:creationId xmlns:a16="http://schemas.microsoft.com/office/drawing/2014/main" id="{051BD399-04F6-4F45-AD04-A96F64F1460C}"/>
+                <a16:creationId xmlns:a16="http://schemas.microsoft.com/office/drawing/2014/main" id="{C7F14F51-3F0B-46B4-887C-C0FBBB8EC83F}"/>
               </a:ext>
             </a:extLst>
           </p:cNvPr>
@@ -12870,7 +13070,7 @@
     </p:spTree>
     <p:extLst>
       <p:ext uri="{BB962C8B-B14F-4D97-AF65-F5344CB8AC3E}">
-        <p14:creationId xmlns:p14="http://schemas.microsoft.com/office/powerpoint/2010/main" val="1947607655"/>
+        <p14:creationId xmlns:p14="http://schemas.microsoft.com/office/powerpoint/2010/main" val="1107238482"/>
       </p:ext>
     </p:extLst>
   </p:cSld>
@@ -13071,7 +13271,7 @@
           <p:cNvPr id="22" name="">
             <a:extLst xmlns:a="http://schemas.openxmlformats.org/drawingml/2006/main">
               <a:ext uri="{FF2B5EF4-FFF2-40B4-BE49-F238E27FC236}">
-                <a16:creationId xmlns:a16="http://schemas.microsoft.com/office/drawing/2014/main" id="{464A64AB-CBCA-493A-94BA-873BA6A8282E}"/>
+                <a16:creationId xmlns:a16="http://schemas.microsoft.com/office/drawing/2014/main" id="{E1134B65-7087-4ACA-9602-F796D176D7D0}"/>
               </a:ext>
             </a:extLst>
           </p:cNvPr>
@@ -13103,7 +13303,7 @@
           <p:cNvPr id="2" name="">
             <a:extLst xmlns:a="http://schemas.openxmlformats.org/drawingml/2006/main">
               <a:ext uri="{FF2B5EF4-FFF2-40B4-BE49-F238E27FC236}">
-                <a16:creationId xmlns:a16="http://schemas.microsoft.com/office/drawing/2014/main" id="{5DEFE8C6-FD5B-46CC-B1AD-C3FC393B24CA}"/>
+                <a16:creationId xmlns:a16="http://schemas.microsoft.com/office/drawing/2014/main" id="{CEABFCF9-B012-4BF2-83D2-83D3461D4157}"/>
               </a:ext>
             </a:extLst>
           </p:cNvPr>
@@ -13160,7 +13360,7 @@
           <p:cNvPr id="3" name="">
             <a:extLst xmlns:a="http://schemas.openxmlformats.org/drawingml/2006/main">
               <a:ext uri="{FF2B5EF4-FFF2-40B4-BE49-F238E27FC236}">
-                <a16:creationId xmlns:a16="http://schemas.microsoft.com/office/drawing/2014/main" id="{D893B5A4-56A7-43BC-AAE0-D0216517ECB5}"/>
+                <a16:creationId xmlns:a16="http://schemas.microsoft.com/office/drawing/2014/main" id="{42214AE5-1F10-460F-B92B-6320919CFF2B}"/>
               </a:ext>
             </a:extLst>
           </p:cNvPr>
@@ -13192,7 +13392,7 @@
           <p:cNvPr id="4" name="">
             <a:extLst xmlns:a="http://schemas.openxmlformats.org/drawingml/2006/main">
               <a:ext uri="{FF2B5EF4-FFF2-40B4-BE49-F238E27FC236}">
-                <a16:creationId xmlns:a16="http://schemas.microsoft.com/office/drawing/2014/main" id="{35B47789-17F7-47FD-A806-0F3372FDF589}"/>
+                <a16:creationId xmlns:a16="http://schemas.microsoft.com/office/drawing/2014/main" id="{D5817A44-1EAB-4BF0-9FB9-E812F18067B2}"/>
               </a:ext>
             </a:extLst>
           </p:cNvPr>
@@ -13249,7 +13449,7 @@
           <p:cNvPr id="5" name="">
             <a:extLst xmlns:a="http://schemas.openxmlformats.org/drawingml/2006/main">
               <a:ext uri="{FF2B5EF4-FFF2-40B4-BE49-F238E27FC236}">
-                <a16:creationId xmlns:a16="http://schemas.microsoft.com/office/drawing/2014/main" id="{B7C1CA67-61FA-46B6-A3E5-4F22F028BB67}"/>
+                <a16:creationId xmlns:a16="http://schemas.microsoft.com/office/drawing/2014/main" id="{78B90B6B-CD71-4816-800A-65B6EAA7F679}"/>
               </a:ext>
             </a:extLst>
           </p:cNvPr>
@@ -13306,7 +13506,7 @@
           <p:cNvPr id="6" name="">
             <a:extLst xmlns:a="http://schemas.openxmlformats.org/drawingml/2006/main">
               <a:ext uri="{FF2B5EF4-FFF2-40B4-BE49-F238E27FC236}">
-                <a16:creationId xmlns:a16="http://schemas.microsoft.com/office/drawing/2014/main" id="{920650F4-EEF9-4D20-AE55-9D5D1A4B6B54}"/>
+                <a16:creationId xmlns:a16="http://schemas.microsoft.com/office/drawing/2014/main" id="{07035B37-CFF7-4A88-B5C0-A06D6DB3EC13}"/>
               </a:ext>
             </a:extLst>
           </p:cNvPr>
@@ -13363,7 +13563,7 @@
           <p:cNvPr id="7" name="">
             <a:extLst xmlns:a="http://schemas.openxmlformats.org/drawingml/2006/main">
               <a:ext uri="{FF2B5EF4-FFF2-40B4-BE49-F238E27FC236}">
-                <a16:creationId xmlns:a16="http://schemas.microsoft.com/office/drawing/2014/main" id="{17EA161C-991D-41EA-B66D-1C40CE80D9F1}"/>
+                <a16:creationId xmlns:a16="http://schemas.microsoft.com/office/drawing/2014/main" id="{D93E2AA3-7CA5-4706-AA77-C03797CF263F}"/>
               </a:ext>
             </a:extLst>
           </p:cNvPr>
@@ -13395,7 +13595,7 @@
           <p:cNvPr id="8" name="">
             <a:extLst xmlns:a="http://schemas.openxmlformats.org/drawingml/2006/main">
               <a:ext uri="{FF2B5EF4-FFF2-40B4-BE49-F238E27FC236}">
-                <a16:creationId xmlns:a16="http://schemas.microsoft.com/office/drawing/2014/main" id="{D6F2463F-9D12-4299-9FB9-0CD02E71464A}"/>
+                <a16:creationId xmlns:a16="http://schemas.microsoft.com/office/drawing/2014/main" id="{CD168C42-DE38-4C8F-9659-EEE534579490}"/>
               </a:ext>
             </a:extLst>
           </p:cNvPr>
@@ -13452,7 +13652,7 @@
           <p:cNvPr id="9" name="">
             <a:extLst xmlns:a="http://schemas.openxmlformats.org/drawingml/2006/main">
               <a:ext uri="{FF2B5EF4-FFF2-40B4-BE49-F238E27FC236}">
-                <a16:creationId xmlns:a16="http://schemas.microsoft.com/office/drawing/2014/main" id="{9A435450-2B4D-4F0A-94C1-AEF75AAB5CB3}"/>
+                <a16:creationId xmlns:a16="http://schemas.microsoft.com/office/drawing/2014/main" id="{17A2BD7F-E3E9-4A5F-8C08-8702714CBA3A}"/>
               </a:ext>
             </a:extLst>
           </p:cNvPr>
@@ -13509,7 +13709,7 @@
           <p:cNvPr id="10" name="">
             <a:extLst xmlns:a="http://schemas.openxmlformats.org/drawingml/2006/main">
               <a:ext uri="{FF2B5EF4-FFF2-40B4-BE49-F238E27FC236}">
-                <a16:creationId xmlns:a16="http://schemas.microsoft.com/office/drawing/2014/main" id="{71CB3F56-083A-4035-A541-1543C46BF51C}"/>
+                <a16:creationId xmlns:a16="http://schemas.microsoft.com/office/drawing/2014/main" id="{201EB33C-9EF6-4B95-A11F-3334BEA52CDF}"/>
               </a:ext>
             </a:extLst>
           </p:cNvPr>
@@ -13543,7 +13743,7 @@
           <p:cNvPr id="11" name="">
             <a:extLst xmlns:a="http://schemas.openxmlformats.org/drawingml/2006/main">
               <a:ext uri="{FF2B5EF4-FFF2-40B4-BE49-F238E27FC236}">
-                <a16:creationId xmlns:a16="http://schemas.microsoft.com/office/drawing/2014/main" id="{F01ECC68-A23D-4644-87B2-C0DD73313B7A}"/>
+                <a16:creationId xmlns:a16="http://schemas.microsoft.com/office/drawing/2014/main" id="{3DBDDEC6-5C77-4F58-990F-6E4520253D59}"/>
               </a:ext>
             </a:extLst>
           </p:cNvPr>
@@ -13575,7 +13775,7 @@
           <p:cNvPr id="12" name="">
             <a:extLst xmlns:a="http://schemas.openxmlformats.org/drawingml/2006/main">
               <a:ext uri="{FF2B5EF4-FFF2-40B4-BE49-F238E27FC236}">
-                <a16:creationId xmlns:a16="http://schemas.microsoft.com/office/drawing/2014/main" id="{6AFF8470-2BCC-43DC-8A2A-EDB506354FD5}"/>
+                <a16:creationId xmlns:a16="http://schemas.microsoft.com/office/drawing/2014/main" id="{E9B490F0-F243-4438-8FE0-42F4792EC4E9}"/>
               </a:ext>
             </a:extLst>
           </p:cNvPr>
@@ -13632,7 +13832,7 @@
           <p:cNvPr id="13" name="">
             <a:extLst xmlns:a="http://schemas.openxmlformats.org/drawingml/2006/main">
               <a:ext uri="{FF2B5EF4-FFF2-40B4-BE49-F238E27FC236}">
-                <a16:creationId xmlns:a16="http://schemas.microsoft.com/office/drawing/2014/main" id="{F8A7981A-1194-4FB1-8D46-95AB6A00E761}"/>
+                <a16:creationId xmlns:a16="http://schemas.microsoft.com/office/drawing/2014/main" id="{2F64D7C2-3F7B-4A7A-ACEA-0D56DA7D7406}"/>
               </a:ext>
             </a:extLst>
           </p:cNvPr>
@@ -13689,7 +13889,7 @@
           <p:cNvPr id="14" name="">
             <a:extLst xmlns:a="http://schemas.openxmlformats.org/drawingml/2006/main">
               <a:ext uri="{FF2B5EF4-FFF2-40B4-BE49-F238E27FC236}">
-                <a16:creationId xmlns:a16="http://schemas.microsoft.com/office/drawing/2014/main" id="{83D9ECC9-7406-459B-9CF4-183E966AE6D4}"/>
+                <a16:creationId xmlns:a16="http://schemas.microsoft.com/office/drawing/2014/main" id="{5D45D740-A435-4D0B-AF3F-BFF941A4AA04}"/>
               </a:ext>
             </a:extLst>
           </p:cNvPr>
@@ -13723,7 +13923,7 @@
           <p:cNvPr id="15" name="">
             <a:extLst xmlns:a="http://schemas.openxmlformats.org/drawingml/2006/main">
               <a:ext uri="{FF2B5EF4-FFF2-40B4-BE49-F238E27FC236}">
-                <a16:creationId xmlns:a16="http://schemas.microsoft.com/office/drawing/2014/main" id="{2F1D8C40-2F6F-4BEB-A085-805EBBEC608D}"/>
+                <a16:creationId xmlns:a16="http://schemas.microsoft.com/office/drawing/2014/main" id="{3AEAF17A-7CA3-4807-ACDB-8B045616450D}"/>
               </a:ext>
             </a:extLst>
           </p:cNvPr>
@@ -13755,7 +13955,7 @@
           <p:cNvPr id="16" name="">
             <a:extLst xmlns:a="http://schemas.openxmlformats.org/drawingml/2006/main">
               <a:ext uri="{FF2B5EF4-FFF2-40B4-BE49-F238E27FC236}">
-                <a16:creationId xmlns:a16="http://schemas.microsoft.com/office/drawing/2014/main" id="{19ADE6C0-10C9-49B3-9E09-08EB7F93BCDE}"/>
+                <a16:creationId xmlns:a16="http://schemas.microsoft.com/office/drawing/2014/main" id="{0B1A3962-09BD-43C9-9425-295B9E7721A5}"/>
               </a:ext>
             </a:extLst>
           </p:cNvPr>
@@ -13812,7 +14012,7 @@
           <p:cNvPr id="17" name="">
             <a:extLst xmlns:a="http://schemas.openxmlformats.org/drawingml/2006/main">
               <a:ext uri="{FF2B5EF4-FFF2-40B4-BE49-F238E27FC236}">
-                <a16:creationId xmlns:a16="http://schemas.microsoft.com/office/drawing/2014/main" id="{4D1FBF2A-97B8-4B8D-898A-1ED0A1A12B50}"/>
+                <a16:creationId xmlns:a16="http://schemas.microsoft.com/office/drawing/2014/main" id="{E9C0E68C-FE11-4F77-AB0C-D4B4A40D8299}"/>
               </a:ext>
             </a:extLst>
           </p:cNvPr>
@@ -13869,7 +14069,7 @@
           <p:cNvPr id="18" name="">
             <a:extLst xmlns:a="http://schemas.openxmlformats.org/drawingml/2006/main">
               <a:ext uri="{FF2B5EF4-FFF2-40B4-BE49-F238E27FC236}">
-                <a16:creationId xmlns:a16="http://schemas.microsoft.com/office/drawing/2014/main" id="{19A00573-A2E4-4F8D-AACD-19976207F40A}"/>
+                <a16:creationId xmlns:a16="http://schemas.microsoft.com/office/drawing/2014/main" id="{DAE6ACE3-8C51-478A-A6F5-A340CDA4B8BA}"/>
               </a:ext>
             </a:extLst>
           </p:cNvPr>
@@ -13903,7 +14103,7 @@
           <p:cNvPr id="19" name="">
             <a:extLst xmlns:a="http://schemas.openxmlformats.org/drawingml/2006/main">
               <a:ext uri="{FF2B5EF4-FFF2-40B4-BE49-F238E27FC236}">
-                <a16:creationId xmlns:a16="http://schemas.microsoft.com/office/drawing/2014/main" id="{DB082BF5-35E8-469B-9372-55E41B0DBFC9}"/>
+                <a16:creationId xmlns:a16="http://schemas.microsoft.com/office/drawing/2014/main" id="{EBF12429-CB04-494D-A22D-93206D624789}"/>
               </a:ext>
             </a:extLst>
           </p:cNvPr>
@@ -13935,7 +14135,7 @@
           <p:cNvPr id="20" name="">
             <a:extLst xmlns:a="http://schemas.openxmlformats.org/drawingml/2006/main">
               <a:ext uri="{FF2B5EF4-FFF2-40B4-BE49-F238E27FC236}">
-                <a16:creationId xmlns:a16="http://schemas.microsoft.com/office/drawing/2014/main" id="{DB19EA93-F77F-463C-AB10-34B35DFA37F4}"/>
+                <a16:creationId xmlns:a16="http://schemas.microsoft.com/office/drawing/2014/main" id="{7D86C046-32ED-4CDB-8550-BAAA67327293}"/>
               </a:ext>
             </a:extLst>
           </p:cNvPr>
@@ -13992,7 +14192,7 @@
           <p:cNvPr id="21" name="">
             <a:extLst xmlns:a="http://schemas.openxmlformats.org/drawingml/2006/main">
               <a:ext uri="{FF2B5EF4-FFF2-40B4-BE49-F238E27FC236}">
-                <a16:creationId xmlns:a16="http://schemas.microsoft.com/office/drawing/2014/main" id="{A48D8F2C-9C40-43FB-8AE7-28217AD7FC10}"/>
+                <a16:creationId xmlns:a16="http://schemas.microsoft.com/office/drawing/2014/main" id="{2DEBDD38-1BA0-4CE5-A945-CBD6297D5483}"/>
               </a:ext>
             </a:extLst>
           </p:cNvPr>
@@ -14047,7 +14247,7 @@
     </p:spTree>
     <p:extLst>
       <p:ext uri="{BB962C8B-B14F-4D97-AF65-F5344CB8AC3E}">
-        <p14:creationId xmlns:p14="http://schemas.microsoft.com/office/powerpoint/2010/main" val="1538581166"/>
+        <p14:creationId xmlns:p14="http://schemas.microsoft.com/office/powerpoint/2010/main" val="2006214633"/>
       </p:ext>
     </p:extLst>
   </p:cSld>
